--- a/Y9_Exploring_Science/9B_Plant_growth/9B_L07_Bias_validity_and_organic_farming.pptx
+++ b/Y9_Exploring_Science/9B_Plant_growth/9B_L07_Bias_validity_and_organic_farming.pptx
@@ -1829,7 +1829,7 @@
         <p:spPr>
           <a:xfrm>
             <a:off x="548640" y="3657600"/>
-            <a:ext cx="10515600" cy="914400"/>
+            <a:ext cx="10515600" cy="1097280"/>
           </a:xfrm>
           <a:prstGeom prst="rect">
             <a:avLst/>
@@ -1842,7 +1842,7 @@
           <a:lstStyle>
             <a:lvl1pPr indent="0" marL="0">
               <a:buNone/>
-              <a:defRPr lang="en-US" sz="2000" dirty="0">
+              <a:defRPr lang="en-US" sz="2400" dirty="0">
                 <a:solidFill>
                   <a:srgbClr val="FFFFFF"/>
                 </a:solidFill>
@@ -1853,7 +1853,7 @@
             <a:pPr indent="0" marL="0">
               <a:buNone/>
             </a:pPr>
-            <a:endParaRPr lang="en-US" sz="2000" dirty="0"/>
+            <a:endParaRPr lang="en-US" sz="2400" dirty="0"/>
           </a:p>
         </p:txBody>
       </p:sp>
@@ -1953,14 +1953,14 @@
               <a:buNone/>
             </a:pPr>
             <a:r>
-              <a:rPr lang="en-US" sz="900" dirty="0">
+              <a:rPr lang="en-US" sz="1000" dirty="0">
                 <a:solidFill>
                   <a:srgbClr val="5B6574"/>
                 </a:solidFill>
               </a:rPr>
               <a:t>Year 9 Science  |  9B Plant growth  |  Lesson 7: Bias, validity and organic farming</a:t>
             </a:r>
-            <a:endParaRPr lang="en-US" sz="900" dirty="0"/>
+            <a:endParaRPr lang="en-US" sz="1000" dirty="0"/>
           </a:p>
         </p:txBody>
       </p:sp>
@@ -2129,14 +2129,14 @@
               <a:buNone/>
             </a:pPr>
             <a:r>
-              <a:rPr lang="en-US" sz="900" dirty="0">
+              <a:rPr lang="en-US" sz="1000" dirty="0">
                 <a:solidFill>
                   <a:srgbClr val="5B6574"/>
                 </a:solidFill>
               </a:rPr>
               <a:t>Year 9 Science  |  9B Plant growth  |  Lesson 7: Bias, validity and organic farming</a:t>
             </a:r>
-            <a:endParaRPr lang="en-US" sz="900" dirty="0"/>
+            <a:endParaRPr lang="en-US" sz="1000" dirty="0"/>
           </a:p>
         </p:txBody>
       </p:sp>
@@ -2305,14 +2305,14 @@
               <a:buNone/>
             </a:pPr>
             <a:r>
-              <a:rPr lang="en-US" sz="900" dirty="0">
+              <a:rPr lang="en-US" sz="1000" dirty="0">
                 <a:solidFill>
                   <a:srgbClr val="5B6574"/>
                 </a:solidFill>
               </a:rPr>
               <a:t>Year 9 Science  |  9B Plant growth  |  Lesson 7: Bias, validity and organic farming</a:t>
             </a:r>
-            <a:endParaRPr lang="en-US" sz="900" dirty="0"/>
+            <a:endParaRPr lang="en-US" sz="1000" dirty="0"/>
           </a:p>
         </p:txBody>
       </p:sp>
@@ -2441,7 +2441,7 @@
           <a:lstStyle>
             <a:lvl1pPr indent="0" marL="0">
               <a:buNone/>
-              <a:defRPr lang="en-US" sz="3000" b="1" dirty="0">
+              <a:defRPr lang="en-US" sz="3400" b="1" dirty="0">
                 <a:solidFill>
                   <a:srgbClr val="3A2E00"/>
                 </a:solidFill>
@@ -2452,7 +2452,7 @@
             <a:pPr indent="0" marL="0">
               <a:buNone/>
             </a:pPr>
-            <a:endParaRPr lang="en-US" sz="3000" dirty="0"/>
+            <a:endParaRPr lang="en-US" sz="3400" dirty="0"/>
           </a:p>
         </p:txBody>
       </p:sp>
@@ -2869,14 +2869,14 @@
               <a:buNone/>
             </a:pPr>
             <a:r>
-              <a:rPr lang="en-US" sz="1300" b="1" spc="200" kern="0" dirty="0">
+              <a:rPr lang="en-US" sz="1400" b="1" spc="200" kern="0" dirty="0">
                 <a:solidFill>
                   <a:srgbClr val="F2CE3E"/>
                 </a:solidFill>
               </a:rPr>
               <a:t>YEAR 9 SCIENCE  ·  9B PLANT GROWTH  ·  LESSON 7 OF 7</a:t>
             </a:r>
-            <a:endParaRPr lang="en-US" sz="1300" dirty="0"/>
+            <a:endParaRPr lang="en-US" sz="1400" dirty="0"/>
           </a:p>
         </p:txBody>
       </p:sp>
@@ -2929,7 +2929,7 @@
         <p:spPr>
           <a:xfrm>
             <a:off x="548640" y="3657600"/>
-            <a:ext cx="10515600" cy="914400"/>
+            <a:ext cx="10515600" cy="1097280"/>
           </a:xfrm>
           <a:prstGeom prst="rect">
             <a:avLst/>
@@ -2945,14 +2945,14 @@
               <a:buNone/>
             </a:pPr>
             <a:r>
-              <a:rPr lang="en-US" sz="2000" dirty="0">
+              <a:rPr lang="en-US" sz="2400" dirty="0">
                 <a:solidFill>
                   <a:srgbClr val="FFFFFF"/>
                 </a:solidFill>
               </a:rPr>
               <a:t>Can you trust this graph? Is organic farming really better?</a:t>
             </a:r>
-            <a:endParaRPr lang="en-US" sz="2000" dirty="0"/>
+            <a:endParaRPr lang="en-US" sz="2400" dirty="0"/>
           </a:p>
         </p:txBody>
       </p:sp>
@@ -2981,14 +2981,14 @@
               <a:buNone/>
             </a:pPr>
             <a:r>
-              <a:rPr lang="en-US" sz="1200" dirty="0">
+              <a:rPr lang="en-US" sz="1400" dirty="0">
                 <a:solidFill>
                   <a:srgbClr val="C9D3E6"/>
                 </a:solidFill>
               </a:rPr>
               <a:t>Exploring Science International 9  ·  Student Book pages 34 to 36  ·  Workbook pages 25 to 26</a:t>
             </a:r>
-            <a:endParaRPr lang="en-US" sz="1200" dirty="0"/>
+            <a:endParaRPr lang="en-US" sz="1400" dirty="0"/>
           </a:p>
         </p:txBody>
       </p:sp>
@@ -3296,23 +3296,21 @@
           <a:ln/>
         </p:spPr>
         <p:txBody>
-          <a:bodyPr wrap="square" lIns="0" tIns="0" rIns="0" bIns="0" rtlCol="0" anchor="t">
-            <a:normAutofit/>
-          </a:bodyPr>
+          <a:bodyPr wrap="square" lIns="0" tIns="0" rIns="0" bIns="0" rtlCol="0" anchor="t"/>
           <a:lstStyle/>
           <a:p>
             <a:pPr indent="0" marL="0">
               <a:buNone/>
             </a:pPr>
             <a:r>
-              <a:rPr lang="en-US" sz="1700" dirty="0">
+              <a:rPr lang="en-US" sz="2000" dirty="0">
                 <a:solidFill>
                   <a:srgbClr val="141B26"/>
                 </a:solidFill>
               </a:rPr>
               <a:t>Core: choose the valid conclusion for the bean plant data and give your reason; match the kinds of error and bias; sort the farming statements.</a:t>
             </a:r>
-            <a:endParaRPr lang="en-US" sz="1700" dirty="0"/>
+            <a:endParaRPr lang="en-US" sz="2000" dirty="0"/>
           </a:p>
         </p:txBody>
       </p:sp>
@@ -3395,23 +3393,21 @@
           <a:ln/>
         </p:spPr>
         <p:txBody>
-          <a:bodyPr wrap="square" lIns="0" tIns="0" rIns="0" bIns="0" rtlCol="0" anchor="t">
-            <a:normAutofit/>
-          </a:bodyPr>
+          <a:bodyPr wrap="square" lIns="0" tIns="0" rIns="0" bIns="0" rtlCol="0" anchor="t"/>
           <a:lstStyle/>
           <a:p>
             <a:pPr indent="0" marL="0">
               <a:buNone/>
             </a:pPr>
             <a:r>
-              <a:rPr lang="en-US" sz="1700" dirty="0">
+              <a:rPr lang="en-US" sz="2000" dirty="0">
                 <a:solidFill>
                   <a:srgbClr val="141B26"/>
                 </a:solidFill>
               </a:rPr>
               <a:t>Stretch: the German insect study; how graph C is biased and who might draw it; insect-eating birds.</a:t>
             </a:r>
-            <a:endParaRPr lang="en-US" sz="1700" dirty="0"/>
+            <a:endParaRPr lang="en-US" sz="2000" dirty="0"/>
           </a:p>
         </p:txBody>
       </p:sp>
@@ -3494,23 +3490,21 @@
           <a:ln/>
         </p:spPr>
         <p:txBody>
-          <a:bodyPr wrap="square" lIns="0" tIns="0" rIns="0" bIns="0" rtlCol="0" anchor="t">
-            <a:normAutofit/>
-          </a:bodyPr>
+          <a:bodyPr wrap="square" lIns="0" tIns="0" rIns="0" bIns="0" rtlCol="0" anchor="t"/>
           <a:lstStyle/>
           <a:p>
             <a:pPr indent="0" marL="0">
               <a:buNone/>
             </a:pPr>
             <a:r>
-              <a:rPr lang="en-US" sz="1700" dirty="0">
+              <a:rPr lang="en-US" sz="2000" dirty="0">
                 <a:solidFill>
                   <a:srgbClr val="141B26"/>
                 </a:solidFill>
               </a:rPr>
               <a:t>Challenge: a balanced paragraph about HT soybean; organic versus intensive yields.</a:t>
             </a:r>
-            <a:endParaRPr lang="en-US" sz="1700" dirty="0"/>
+            <a:endParaRPr lang="en-US" sz="2000" dirty="0"/>
           </a:p>
         </p:txBody>
       </p:sp>
@@ -3593,23 +3587,21 @@
           <a:ln/>
         </p:spPr>
         <p:txBody>
-          <a:bodyPr wrap="square" lIns="0" tIns="0" rIns="0" bIns="0" rtlCol="0" anchor="t">
-            <a:normAutofit/>
-          </a:bodyPr>
+          <a:bodyPr wrap="square" lIns="0" tIns="0" rIns="0" bIns="0" rtlCol="0" anchor="t"/>
           <a:lstStyle/>
           <a:p>
             <a:pPr indent="0" marL="0">
               <a:buNone/>
             </a:pPr>
             <a:r>
-              <a:rPr lang="en-US" sz="1700" dirty="0">
+              <a:rPr lang="en-US" sz="2000" dirty="0">
                 <a:solidFill>
                   <a:srgbClr val="141B26"/>
                 </a:solidFill>
               </a:rPr>
               <a:t>Finished? The My thinking question is about a website claim.</a:t>
             </a:r>
-            <a:endParaRPr lang="en-US" sz="1700" dirty="0"/>
+            <a:endParaRPr lang="en-US" sz="2000" dirty="0"/>
           </a:p>
         </p:txBody>
       </p:sp>
@@ -3638,14 +3630,14 @@
               <a:buNone/>
             </a:pPr>
             <a:r>
-              <a:rPr lang="en-US" sz="1300" i="1" dirty="0">
+              <a:rPr lang="en-US" sz="1500" i="1" dirty="0">
                 <a:solidFill>
                   <a:srgbClr val="5B6574"/>
                 </a:solidFill>
               </a:rPr>
               <a:t>A balanced paragraph has at least two points for and two against, then a decision.</a:t>
             </a:r>
-            <a:endParaRPr lang="en-US" sz="1300" dirty="0"/>
+            <a:endParaRPr lang="en-US" sz="1500" dirty="0"/>
           </a:p>
         </p:txBody>
       </p:sp>
@@ -3838,23 +3830,21 @@
           <a:ln/>
         </p:spPr>
         <p:txBody>
-          <a:bodyPr wrap="square" lIns="0" tIns="0" rIns="0" bIns="0" rtlCol="0" anchor="t">
-            <a:normAutofit/>
-          </a:bodyPr>
+          <a:bodyPr wrap="square" lIns="0" tIns="0" rIns="0" bIns="0" rtlCol="0" anchor="t"/>
           <a:lstStyle/>
           <a:p>
             <a:pPr indent="0" marL="0">
               <a:buNone/>
             </a:pPr>
             <a:r>
-              <a:rPr lang="en-US" sz="2200" b="1" dirty="0">
+              <a:rPr lang="en-US" sz="2600" b="1" dirty="0">
                 <a:solidFill>
                   <a:srgbClr val="0F2A5F"/>
                 </a:solidFill>
               </a:rPr>
               <a:t>A farmer wants permission to plough a wild meadow. The report to the council has a graph showing profits rising every year, and a list of benefits. How would you check this report for bias and validity?</a:t>
             </a:r>
-            <a:endParaRPr lang="en-US" sz="2200" dirty="0"/>
+            <a:endParaRPr lang="en-US" sz="2600" dirty="0"/>
           </a:p>
         </p:txBody>
       </p:sp>
@@ -3903,9 +3893,7 @@
           <a:ln/>
         </p:spPr>
         <p:txBody>
-          <a:bodyPr wrap="square" lIns="0" tIns="0" rIns="0" bIns="0" rtlCol="0" anchor="t">
-            <a:normAutofit/>
-          </a:bodyPr>
+          <a:bodyPr wrap="square" lIns="0" tIns="0" rIns="0" bIns="0" rtlCol="0" anchor="t"/>
           <a:lstStyle/>
           <a:p>
             <a:pPr indent="0" marL="0">
@@ -3915,14 +3903,14 @@
               <a:buNone/>
             </a:pPr>
             <a:r>
-              <a:rPr lang="en-US" sz="1500" b="1" dirty="0">
+              <a:rPr lang="en-US" sz="1800" b="1" dirty="0">
                 <a:solidFill>
                   <a:srgbClr val="7B3A8E"/>
                 </a:solidFill>
               </a:rPr>
               <a:t>Sentence frames</a:t>
             </a:r>
-            <a:endParaRPr lang="en-US" sz="1500" dirty="0"/>
+            <a:endParaRPr lang="en-US" sz="1800" dirty="0"/>
           </a:p>
           <a:p>
             <a:pPr indent="0" marL="0">
@@ -3932,14 +3920,14 @@
               <a:buNone/>
             </a:pPr>
             <a:r>
-              <a:rPr lang="en-US" sz="1500" dirty="0">
+              <a:rPr lang="en-US" sz="1800" dirty="0">
                 <a:solidFill>
                   <a:srgbClr val="141B26"/>
                 </a:solidFill>
               </a:rPr>
               <a:t>I would check whether ___, because ___.</a:t>
             </a:r>
-            <a:endParaRPr lang="en-US" sz="1500" dirty="0"/>
+            <a:endParaRPr lang="en-US" sz="1800" dirty="0"/>
           </a:p>
           <a:p>
             <a:pPr indent="0" marL="0">
@@ -3949,14 +3937,14 @@
               <a:buNone/>
             </a:pPr>
             <a:r>
-              <a:rPr lang="en-US" sz="1500" dirty="0">
+              <a:rPr lang="en-US" sz="1800" dirty="0">
                 <a:solidFill>
                   <a:srgbClr val="141B26"/>
                 </a:solidFill>
               </a:rPr>
               <a:t>The report might be biased because ___.</a:t>
             </a:r>
-            <a:endParaRPr lang="en-US" sz="1500" dirty="0"/>
+            <a:endParaRPr lang="en-US" sz="1800" dirty="0"/>
           </a:p>
           <a:p>
             <a:pPr indent="0" marL="0">
@@ -3966,14 +3954,14 @@
               <a:buNone/>
             </a:pPr>
             <a:r>
-              <a:rPr lang="en-US" sz="1500" dirty="0">
+              <a:rPr lang="en-US" sz="1800" dirty="0">
                 <a:solidFill>
                   <a:srgbClr val="141B26"/>
                 </a:solidFill>
               </a:rPr>
               <a:t>A balanced report would also include ___.</a:t>
             </a:r>
-            <a:endParaRPr lang="en-US" sz="1500" dirty="0"/>
+            <a:endParaRPr lang="en-US" sz="1800" dirty="0"/>
           </a:p>
         </p:txBody>
       </p:sp>
@@ -4173,14 +4161,14 @@
               <a:buNone/>
             </a:pPr>
             <a:r>
-              <a:rPr lang="en-US" sz="1400" i="1" dirty="0">
+              <a:rPr lang="en-US" sz="1600" i="1" dirty="0">
                 <a:solidFill>
                   <a:srgbClr val="5B6574"/>
                 </a:solidFill>
               </a:rPr>
               <a:t>Mini whiteboards. Eight questions from the whole unit, then we check and you tick your gaps.</a:t>
             </a:r>
-            <a:endParaRPr lang="en-US" sz="1400" dirty="0"/>
+            <a:endParaRPr lang="en-US" sz="1600" dirty="0"/>
           </a:p>
         </p:txBody>
       </p:sp>
@@ -4229,16 +4217,14 @@
           <a:ln/>
         </p:spPr>
         <p:txBody>
-          <a:bodyPr wrap="square" lIns="0" tIns="0" rIns="0" bIns="0" rtlCol="0" anchor="ctr">
-            <a:normAutofit/>
-          </a:bodyPr>
+          <a:bodyPr wrap="square" lIns="0" tIns="0" rIns="0" bIns="0" rtlCol="0" anchor="ctr"/>
           <a:lstStyle/>
           <a:p>
             <a:pPr indent="0" marL="0">
               <a:buNone/>
             </a:pPr>
             <a:r>
-              <a:rPr lang="en-US" sz="1600" b="1" dirty="0">
+              <a:rPr lang="en-US" sz="2000" b="1" dirty="0">
                 <a:solidFill>
                   <a:srgbClr val="7B3A8E"/>
                 </a:solidFill>
@@ -4249,14 +4235,14 @@
               <a:buNone/>
             </a:pPr>
             <a:r>
-              <a:rPr lang="en-US" sz="1600" dirty="0">
+              <a:rPr lang="en-US" sz="2000" dirty="0">
                 <a:solidFill>
                   <a:srgbClr val="141B26"/>
                 </a:solidFill>
               </a:rPr>
               <a:t>Write the word equation for photosynthesis.</a:t>
             </a:r>
-            <a:endParaRPr lang="en-US" sz="1600" dirty="0"/>
+            <a:endParaRPr lang="en-US" sz="2000" dirty="0"/>
           </a:p>
         </p:txBody>
       </p:sp>
@@ -4305,16 +4291,14 @@
           <a:ln/>
         </p:spPr>
         <p:txBody>
-          <a:bodyPr wrap="square" lIns="0" tIns="0" rIns="0" bIns="0" rtlCol="0" anchor="ctr">
-            <a:normAutofit/>
-          </a:bodyPr>
+          <a:bodyPr wrap="square" lIns="0" tIns="0" rIns="0" bIns="0" rtlCol="0" anchor="ctr"/>
           <a:lstStyle/>
           <a:p>
             <a:pPr indent="0" marL="0">
               <a:buNone/>
             </a:pPr>
             <a:r>
-              <a:rPr lang="en-US" sz="1600" b="1" dirty="0">
+              <a:rPr lang="en-US" sz="2000" b="1" dirty="0">
                 <a:solidFill>
                   <a:srgbClr val="7B3A8E"/>
                 </a:solidFill>
@@ -4325,14 +4309,14 @@
               <a:buNone/>
             </a:pPr>
             <a:r>
-              <a:rPr lang="en-US" sz="1600" dirty="0">
+              <a:rPr lang="en-US" sz="2000" dirty="0">
                 <a:solidFill>
                   <a:srgbClr val="141B26"/>
                 </a:solidFill>
               </a:rPr>
               <a:t>Which cells open and close the stomata?</a:t>
             </a:r>
-            <a:endParaRPr lang="en-US" sz="1600" dirty="0"/>
+            <a:endParaRPr lang="en-US" sz="2000" dirty="0"/>
           </a:p>
         </p:txBody>
       </p:sp>
@@ -4381,16 +4365,14 @@
           <a:ln/>
         </p:spPr>
         <p:txBody>
-          <a:bodyPr wrap="square" lIns="0" tIns="0" rIns="0" bIns="0" rtlCol="0" anchor="ctr">
-            <a:normAutofit/>
-          </a:bodyPr>
+          <a:bodyPr wrap="square" lIns="0" tIns="0" rIns="0" bIns="0" rtlCol="0" anchor="ctr"/>
           <a:lstStyle/>
           <a:p>
             <a:pPr indent="0" marL="0">
               <a:buNone/>
             </a:pPr>
             <a:r>
-              <a:rPr lang="en-US" sz="1600" b="1" dirty="0">
+              <a:rPr lang="en-US" sz="2000" b="1" dirty="0">
                 <a:solidFill>
                   <a:srgbClr val="7B3A8E"/>
                 </a:solidFill>
@@ -4401,14 +4383,14 @@
               <a:buNone/>
             </a:pPr>
             <a:r>
-              <a:rPr lang="en-US" sz="1600" dirty="0">
+              <a:rPr lang="en-US" sz="2000" dirty="0">
                 <a:solidFill>
                   <a:srgbClr val="141B26"/>
                 </a:solidFill>
               </a:rPr>
               <a:t>Name the mineral salt plants need to make proteins.</a:t>
             </a:r>
-            <a:endParaRPr lang="en-US" sz="1600" dirty="0"/>
+            <a:endParaRPr lang="en-US" sz="2000" dirty="0"/>
           </a:p>
         </p:txBody>
       </p:sp>
@@ -4457,16 +4439,14 @@
           <a:ln/>
         </p:spPr>
         <p:txBody>
-          <a:bodyPr wrap="square" lIns="0" tIns="0" rIns="0" bIns="0" rtlCol="0" anchor="ctr">
-            <a:normAutofit/>
-          </a:bodyPr>
+          <a:bodyPr wrap="square" lIns="0" tIns="0" rIns="0" bIns="0" rtlCol="0" anchor="ctr"/>
           <a:lstStyle/>
           <a:p>
             <a:pPr indent="0" marL="0">
               <a:buNone/>
             </a:pPr>
             <a:r>
-              <a:rPr lang="en-US" sz="1600" b="1" dirty="0">
+              <a:rPr lang="en-US" sz="2000" b="1" dirty="0">
                 <a:solidFill>
                   <a:srgbClr val="7B3A8E"/>
                 </a:solidFill>
@@ -4477,14 +4457,14 @@
               <a:buNone/>
             </a:pPr>
             <a:r>
-              <a:rPr lang="en-US" sz="1600" dirty="0">
+              <a:rPr lang="en-US" sz="2000" dirty="0">
                 <a:solidFill>
                   <a:srgbClr val="141B26"/>
                 </a:solidFill>
               </a:rPr>
               <a:t>What colour does iodine solution turn with starch?</a:t>
             </a:r>
-            <a:endParaRPr lang="en-US" sz="1600" dirty="0"/>
+            <a:endParaRPr lang="en-US" sz="2000" dirty="0"/>
           </a:p>
         </p:txBody>
       </p:sp>
@@ -4533,16 +4513,14 @@
           <a:ln/>
         </p:spPr>
         <p:txBody>
-          <a:bodyPr wrap="square" lIns="0" tIns="0" rIns="0" bIns="0" rtlCol="0" anchor="ctr">
-            <a:normAutofit/>
-          </a:bodyPr>
+          <a:bodyPr wrap="square" lIns="0" tIns="0" rIns="0" bIns="0" rtlCol="0" anchor="ctr"/>
           <a:lstStyle/>
           <a:p>
             <a:pPr indent="0" marL="0">
               <a:buNone/>
             </a:pPr>
             <a:r>
-              <a:rPr lang="en-US" sz="1600" b="1" dirty="0">
+              <a:rPr lang="en-US" sz="2000" b="1" dirty="0">
                 <a:solidFill>
                   <a:srgbClr val="7B3A8E"/>
                 </a:solidFill>
@@ -4553,14 +4531,14 @@
               <a:buNone/>
             </a:pPr>
             <a:r>
-              <a:rPr lang="en-US" sz="1600" dirty="0">
+              <a:rPr lang="en-US" sz="2000" dirty="0">
                 <a:solidFill>
                   <a:srgbClr val="141B26"/>
                 </a:solidFill>
               </a:rPr>
               <a:t>What is the difference between an insecticide and a herbicide?</a:t>
             </a:r>
-            <a:endParaRPr lang="en-US" sz="1600" dirty="0"/>
+            <a:endParaRPr lang="en-US" sz="2000" dirty="0"/>
           </a:p>
         </p:txBody>
       </p:sp>
@@ -4609,16 +4587,14 @@
           <a:ln/>
         </p:spPr>
         <p:txBody>
-          <a:bodyPr wrap="square" lIns="0" tIns="0" rIns="0" bIns="0" rtlCol="0" anchor="ctr">
-            <a:normAutofit/>
-          </a:bodyPr>
+          <a:bodyPr wrap="square" lIns="0" tIns="0" rIns="0" bIns="0" rtlCol="0" anchor="ctr"/>
           <a:lstStyle/>
           <a:p>
             <a:pPr indent="0" marL="0">
               <a:buNone/>
             </a:pPr>
             <a:r>
-              <a:rPr lang="en-US" sz="1600" b="1" dirty="0">
+              <a:rPr lang="en-US" sz="1500" b="1" dirty="0">
                 <a:solidFill>
                   <a:srgbClr val="7B3A8E"/>
                 </a:solidFill>
@@ -4629,14 +4605,14 @@
               <a:buNone/>
             </a:pPr>
             <a:r>
-              <a:rPr lang="en-US" sz="1600" dirty="0">
+              <a:rPr lang="en-US" sz="1500" dirty="0">
                 <a:solidFill>
                   <a:srgbClr val="141B26"/>
                 </a:solidFill>
               </a:rPr>
               <a:t>Put these in order: algae grow, fish die, fertiliser washes into the lake, decomposers use oxygen.</a:t>
             </a:r>
-            <a:endParaRPr lang="en-US" sz="1600" dirty="0"/>
+            <a:endParaRPr lang="en-US" sz="1500" dirty="0"/>
           </a:p>
         </p:txBody>
       </p:sp>
@@ -4685,16 +4661,14 @@
           <a:ln/>
         </p:spPr>
         <p:txBody>
-          <a:bodyPr wrap="square" lIns="0" tIns="0" rIns="0" bIns="0" rtlCol="0" anchor="ctr">
-            <a:normAutofit/>
-          </a:bodyPr>
+          <a:bodyPr wrap="square" lIns="0" tIns="0" rIns="0" bIns="0" rtlCol="0" anchor="ctr"/>
           <a:lstStyle/>
           <a:p>
             <a:pPr indent="0" marL="0">
               <a:buNone/>
             </a:pPr>
             <a:r>
-              <a:rPr lang="en-US" sz="1600" b="1" dirty="0">
+              <a:rPr lang="en-US" sz="2000" b="1" dirty="0">
                 <a:solidFill>
                   <a:srgbClr val="7B3A8E"/>
                 </a:solidFill>
@@ -4705,14 +4679,14 @@
               <a:buNone/>
             </a:pPr>
             <a:r>
-              <a:rPr lang="en-US" sz="1600" dirty="0">
+              <a:rPr lang="en-US" sz="2000" dirty="0">
                 <a:solidFill>
                   <a:srgbClr val="141B26"/>
                 </a:solidFill>
               </a:rPr>
               <a:t>Name two processes that release carbon dioxide into the air.</a:t>
             </a:r>
-            <a:endParaRPr lang="en-US" sz="1600" dirty="0"/>
+            <a:endParaRPr lang="en-US" sz="2000" dirty="0"/>
           </a:p>
         </p:txBody>
       </p:sp>
@@ -4761,16 +4735,14 @@
           <a:ln/>
         </p:spPr>
         <p:txBody>
-          <a:bodyPr wrap="square" lIns="0" tIns="0" rIns="0" bIns="0" rtlCol="0" anchor="ctr">
-            <a:normAutofit/>
-          </a:bodyPr>
+          <a:bodyPr wrap="square" lIns="0" tIns="0" rIns="0" bIns="0" rtlCol="0" anchor="ctr"/>
           <a:lstStyle/>
           <a:p>
             <a:pPr indent="0" marL="0">
               <a:buNone/>
             </a:pPr>
             <a:r>
-              <a:rPr lang="en-US" sz="1600" b="1" dirty="0">
+              <a:rPr lang="en-US" sz="2000" b="1" dirty="0">
                 <a:solidFill>
                   <a:srgbClr val="7B3A8E"/>
                 </a:solidFill>
@@ -4781,14 +4753,14 @@
               <a:buNone/>
             </a:pPr>
             <a:r>
-              <a:rPr lang="en-US" sz="1600" dirty="0">
+              <a:rPr lang="en-US" sz="2000" dirty="0">
                 <a:solidFill>
                   <a:srgbClr val="141B26"/>
                 </a:solidFill>
               </a:rPr>
               <a:t>What makes a conclusion valid?</a:t>
             </a:r>
-            <a:endParaRPr lang="en-US" sz="1600" dirty="0"/>
+            <a:endParaRPr lang="en-US" sz="2000" dirty="0"/>
           </a:p>
         </p:txBody>
       </p:sp>
@@ -4988,14 +4960,14 @@
               <a:buNone/>
             </a:pPr>
             <a:r>
-              <a:rPr lang="en-US" sz="1400" i="1" dirty="0">
+              <a:rPr lang="en-US" sz="1600" i="1" dirty="0">
                 <a:solidFill>
                   <a:srgbClr val="5B6574"/>
                 </a:solidFill>
               </a:rPr>
               <a:t>On your worksheet exit ticket. Work alone. Hand it in as you leave.</a:t>
             </a:r>
-            <a:endParaRPr lang="en-US" sz="1400" dirty="0"/>
+            <a:endParaRPr lang="en-US" sz="1600" dirty="0"/>
           </a:p>
         </p:txBody>
       </p:sp>
@@ -5008,7 +4980,7 @@
         <p:spPr>
           <a:xfrm>
             <a:off x="548640" y="1828800"/>
-            <a:ext cx="10881360" cy="1188720"/>
+            <a:ext cx="9692640" cy="1188720"/>
           </a:xfrm>
           <a:prstGeom prst="rect">
             <a:avLst/>
@@ -5017,16 +4989,14 @@
           <a:ln/>
         </p:spPr>
         <p:txBody>
-          <a:bodyPr wrap="square" lIns="0" tIns="0" rIns="0" bIns="0" rtlCol="0" anchor="t">
-            <a:normAutofit/>
-          </a:bodyPr>
+          <a:bodyPr wrap="square" lIns="0" tIns="0" rIns="0" bIns="0" rtlCol="0" anchor="t"/>
           <a:lstStyle/>
           <a:p>
             <a:pPr indent="0" marL="0">
               <a:buNone/>
             </a:pPr>
             <a:r>
-              <a:rPr lang="en-US" sz="1800" b="1" dirty="0">
+              <a:rPr lang="en-US" sz="2200" b="1" dirty="0">
                 <a:solidFill>
                   <a:srgbClr val="7B3A8E"/>
                 </a:solidFill>
@@ -5037,14 +5007,14 @@
               <a:buNone/>
             </a:pPr>
             <a:r>
-              <a:rPr lang="en-US" sz="1800" dirty="0">
+              <a:rPr lang="en-US" sz="2200" dirty="0">
                 <a:solidFill>
                   <a:srgbClr val="141B26"/>
                 </a:solidFill>
               </a:rPr>
               <a:t>What is bias?</a:t>
             </a:r>
-            <a:endParaRPr lang="en-US" sz="1800" dirty="0"/>
+            <a:endParaRPr lang="en-US" sz="2200" dirty="0"/>
           </a:p>
         </p:txBody>
       </p:sp>
@@ -5057,7 +5027,7 @@
         <p:spPr>
           <a:xfrm>
             <a:off x="548640" y="3017520"/>
-            <a:ext cx="10881360" cy="1188720"/>
+            <a:ext cx="9692640" cy="1188720"/>
           </a:xfrm>
           <a:prstGeom prst="rect">
             <a:avLst/>
@@ -5066,16 +5036,14 @@
           <a:ln/>
         </p:spPr>
         <p:txBody>
-          <a:bodyPr wrap="square" lIns="0" tIns="0" rIns="0" bIns="0" rtlCol="0" anchor="t">
-            <a:normAutofit/>
-          </a:bodyPr>
+          <a:bodyPr wrap="square" lIns="0" tIns="0" rIns="0" bIns="0" rtlCol="0" anchor="t"/>
           <a:lstStyle/>
           <a:p>
             <a:pPr indent="0" marL="0">
               <a:buNone/>
             </a:pPr>
             <a:r>
-              <a:rPr lang="en-US" sz="1800" b="1" dirty="0">
+              <a:rPr lang="en-US" sz="2200" b="1" dirty="0">
                 <a:solidFill>
                   <a:srgbClr val="7B3A8E"/>
                 </a:solidFill>
@@ -5086,14 +5054,14 @@
               <a:buNone/>
             </a:pPr>
             <a:r>
-              <a:rPr lang="en-US" sz="1800" dirty="0">
+              <a:rPr lang="en-US" sz="2200" dirty="0">
                 <a:solidFill>
                   <a:srgbClr val="141B26"/>
                 </a:solidFill>
               </a:rPr>
               <a:t>Give one example of a systematic error.</a:t>
             </a:r>
-            <a:endParaRPr lang="en-US" sz="1800" dirty="0"/>
+            <a:endParaRPr lang="en-US" sz="2200" dirty="0"/>
           </a:p>
         </p:txBody>
       </p:sp>
@@ -5106,7 +5074,7 @@
         <p:spPr>
           <a:xfrm>
             <a:off x="548640" y="4206240"/>
-            <a:ext cx="10881360" cy="1188720"/>
+            <a:ext cx="9692640" cy="1188720"/>
           </a:xfrm>
           <a:prstGeom prst="rect">
             <a:avLst/>
@@ -5115,16 +5083,14 @@
           <a:ln/>
         </p:spPr>
         <p:txBody>
-          <a:bodyPr wrap="square" lIns="0" tIns="0" rIns="0" bIns="0" rtlCol="0" anchor="t">
-            <a:normAutofit/>
-          </a:bodyPr>
+          <a:bodyPr wrap="square" lIns="0" tIns="0" rIns="0" bIns="0" rtlCol="0" anchor="t"/>
           <a:lstStyle/>
           <a:p>
             <a:pPr indent="0" marL="0">
               <a:buNone/>
             </a:pPr>
             <a:r>
-              <a:rPr lang="en-US" sz="1800" b="1" dirty="0">
+              <a:rPr lang="en-US" sz="2200" b="1" dirty="0">
                 <a:solidFill>
                   <a:srgbClr val="7B3A8E"/>
                 </a:solidFill>
@@ -5135,14 +5101,14 @@
               <a:buNone/>
             </a:pPr>
             <a:r>
-              <a:rPr lang="en-US" sz="1800" dirty="0">
+              <a:rPr lang="en-US" sz="2200" dirty="0">
                 <a:solidFill>
                   <a:srgbClr val="141B26"/>
                 </a:solidFill>
               </a:rPr>
               <a:t>Give one difference between organic farming and intensive farming.</a:t>
             </a:r>
-            <a:endParaRPr lang="en-US" sz="1800" dirty="0"/>
+            <a:endParaRPr lang="en-US" sz="2200" dirty="0"/>
           </a:p>
         </p:txBody>
       </p:sp>
@@ -5401,7 +5367,7 @@
         <p:spPr>
           <a:xfrm>
             <a:off x="548640" y="1371600"/>
-            <a:ext cx="10881360" cy="4480560"/>
+            <a:ext cx="10881360" cy="4114800"/>
           </a:xfrm>
           <a:prstGeom prst="rect">
             <a:avLst/>
@@ -5410,99 +5376,97 @@
           <a:ln/>
         </p:spPr>
         <p:txBody>
-          <a:bodyPr wrap="square" lIns="0" tIns="0" rIns="0" bIns="0" rtlCol="0" anchor="t">
-            <a:normAutofit/>
-          </a:bodyPr>
+          <a:bodyPr wrap="square" lIns="0" tIns="0" rIns="0" bIns="0" rtlCol="0" anchor="t"/>
           <a:lstStyle/>
           <a:p>
             <a:pPr marL="342900" indent="-342900">
               <a:spcAft>
-                <a:spcPts val="1000"/>
+                <a:spcPts val="1200"/>
               </a:spcAft>
               <a:buSzPct val="100000"/>
               <a:buChar char="✓"/>
             </a:pPr>
             <a:r>
-              <a:rPr lang="en-US" sz="1700" dirty="0">
+              <a:rPr lang="en-US" sz="2000" dirty="0">
                 <a:solidFill>
                   <a:srgbClr val="141B26"/>
                 </a:solidFill>
               </a:rPr>
               <a:t>Bias is a shift from the truth: intentional (selected data) or accidental (systematic error, poor sampling).</a:t>
             </a:r>
-            <a:endParaRPr lang="en-US" sz="1700" dirty="0"/>
+            <a:endParaRPr lang="en-US" sz="2000" dirty="0"/>
           </a:p>
           <a:p>
             <a:pPr marL="342900" indent="-342900">
               <a:spcAft>
-                <a:spcPts val="1000"/>
+                <a:spcPts val="1200"/>
               </a:spcAft>
               <a:buSzPct val="100000"/>
               <a:buChar char="✓"/>
             </a:pPr>
             <a:r>
-              <a:rPr lang="en-US" sz="1700" dirty="0">
+              <a:rPr lang="en-US" sz="2000" dirty="0">
                 <a:solidFill>
                   <a:srgbClr val="141B26"/>
                 </a:solidFill>
               </a:rPr>
               <a:t>A valid conclusion uses all the results and only the results, and does not claim causes that were never tested.</a:t>
             </a:r>
-            <a:endParaRPr lang="en-US" sz="1700" dirty="0"/>
+            <a:endParaRPr lang="en-US" sz="2000" dirty="0"/>
           </a:p>
           <a:p>
             <a:pPr marL="342900" indent="-342900">
               <a:spcAft>
-                <a:spcPts val="1000"/>
+                <a:spcPts val="1200"/>
               </a:spcAft>
               <a:buSzPct val="100000"/>
               <a:buChar char="✓"/>
             </a:pPr>
             <a:r>
-              <a:rPr lang="en-US" sz="1700" dirty="0">
+              <a:rPr lang="en-US" sz="2000" dirty="0">
                 <a:solidFill>
                   <a:srgbClr val="141B26"/>
                 </a:solidFill>
               </a:rPr>
               <a:t>Organic farms: natural fertilisers, few pesticides, biological control, more biodiversity, lower yield per field.</a:t>
             </a:r>
-            <a:endParaRPr lang="en-US" sz="1700" dirty="0"/>
+            <a:endParaRPr lang="en-US" sz="2000" dirty="0"/>
           </a:p>
           <a:p>
             <a:pPr marL="342900" indent="-342900">
               <a:spcAft>
-                <a:spcPts val="1000"/>
+                <a:spcPts val="1200"/>
               </a:spcAft>
               <a:buSzPct val="100000"/>
               <a:buChar char="✓"/>
             </a:pPr>
             <a:r>
-              <a:rPr lang="en-US" sz="1700" dirty="0">
+              <a:rPr lang="en-US" sz="2000" dirty="0">
                 <a:solidFill>
                   <a:srgbClr val="141B26"/>
                 </a:solidFill>
               </a:rPr>
               <a:t>Intensive farms: artificial fertilisers and pesticides, large fields, higher yield, more risk to rivers and food webs.</a:t>
             </a:r>
-            <a:endParaRPr lang="en-US" sz="1700" dirty="0"/>
+            <a:endParaRPr lang="en-US" sz="2000" dirty="0"/>
           </a:p>
           <a:p>
             <a:pPr marL="342900" indent="-342900">
               <a:spcAft>
-                <a:spcPts val="1000"/>
+                <a:spcPts val="1200"/>
               </a:spcAft>
               <a:buSzPct val="100000"/>
               <a:buChar char="✓"/>
             </a:pPr>
             <a:r>
-              <a:rPr lang="en-US" sz="1700" dirty="0">
+              <a:rPr lang="en-US" sz="2000" dirty="0">
                 <a:solidFill>
                   <a:srgbClr val="141B26"/>
                 </a:solidFill>
               </a:rPr>
               <a:t>Across 9B: plants make glucose by photosynthesis and build everything else from it; farming is about supplying what plants need without wrecking what else lives there.</a:t>
             </a:r>
-            <a:endParaRPr lang="en-US" sz="1700" dirty="0"/>
+            <a:endParaRPr lang="en-US" sz="2000" dirty="0"/>
           </a:p>
         </p:txBody>
       </p:sp>
@@ -5531,7 +5495,7 @@
               <a:buNone/>
             </a:pPr>
             <a:r>
-              <a:rPr lang="en-US" sz="1300" b="1" dirty="0">
+              <a:rPr lang="en-US" sz="1500" b="1" dirty="0">
                 <a:solidFill>
                   <a:srgbClr val="7B3A8E"/>
                 </a:solidFill>
@@ -5542,14 +5506,14 @@
               <a:buNone/>
             </a:pPr>
             <a:r>
-              <a:rPr lang="en-US" sz="1300" dirty="0">
+              <a:rPr lang="en-US" sz="1500" dirty="0">
                 <a:solidFill>
                   <a:srgbClr val="141B26"/>
                 </a:solidFill>
               </a:rPr>
               <a:t>9C Threat from disease: pathogens, immunity and how the body is controlled.</a:t>
             </a:r>
-            <a:endParaRPr lang="en-US" sz="1300" dirty="0"/>
+            <a:endParaRPr lang="en-US" sz="1500" dirty="0"/>
           </a:p>
         </p:txBody>
       </p:sp>
@@ -5817,77 +5781,75 @@
           <a:ln/>
         </p:spPr>
         <p:txBody>
-          <a:bodyPr wrap="square" lIns="0" tIns="0" rIns="0" bIns="0" rtlCol="0" anchor="t">
-            <a:normAutofit/>
-          </a:bodyPr>
+          <a:bodyPr wrap="square" lIns="0" tIns="0" rIns="0" bIns="0" rtlCol="0" anchor="t"/>
           <a:lstStyle/>
           <a:p>
             <a:pPr indent="0" marL="0">
               <a:spcAft>
-                <a:spcPts val="1000"/>
+                <a:spcPts val="1200"/>
               </a:spcAft>
               <a:buNone/>
             </a:pPr>
             <a:r>
-              <a:rPr lang="en-US" sz="2000" dirty="0">
+              <a:rPr lang="en-US" sz="2300" dirty="0">
                 <a:solidFill>
                   <a:srgbClr val="141B26"/>
                 </a:solidFill>
               </a:rPr>
               <a:t>Monarch butterflies lay their eggs only on milkweed plants. HT soybean is a variety that is not killed by the herbicide glyphosate, which kills milkweed.</a:t>
             </a:r>
-            <a:endParaRPr lang="en-US" sz="2000" dirty="0"/>
+            <a:endParaRPr lang="en-US" sz="2300" dirty="0"/>
           </a:p>
           <a:p>
             <a:pPr indent="0" marL="0">
               <a:spcAft>
-                <a:spcPts val="1000"/>
+                <a:spcPts val="1200"/>
               </a:spcAft>
               <a:buNone/>
             </a:pPr>
             <a:r>
-              <a:rPr lang="en-US" sz="2000" dirty="0">
+              <a:rPr lang="en-US" sz="2300" dirty="0">
                 <a:solidFill>
                   <a:srgbClr val="141B26"/>
                 </a:solidFill>
               </a:rPr>
               <a:t>1. Predict what happens to milkweed where HT soybean is grown.</a:t>
             </a:r>
-            <a:endParaRPr lang="en-US" sz="2000" dirty="0"/>
+            <a:endParaRPr lang="en-US" sz="2300" dirty="0"/>
           </a:p>
           <a:p>
             <a:pPr indent="0" marL="0">
               <a:spcAft>
-                <a:spcPts val="1000"/>
+                <a:spcPts val="1200"/>
               </a:spcAft>
               <a:buNone/>
             </a:pPr>
             <a:r>
-              <a:rPr lang="en-US" sz="2000" dirty="0">
+              <a:rPr lang="en-US" sz="2300" dirty="0">
                 <a:solidFill>
                   <a:srgbClr val="141B26"/>
                 </a:solidFill>
               </a:rPr>
               <a:t>2. Predict the effect on monarch butterflies.</a:t>
             </a:r>
-            <a:endParaRPr lang="en-US" sz="2000" dirty="0"/>
+            <a:endParaRPr lang="en-US" sz="2300" dirty="0"/>
           </a:p>
           <a:p>
             <a:pPr indent="0" marL="0">
               <a:spcAft>
-                <a:spcPts val="1000"/>
+                <a:spcPts val="1200"/>
               </a:spcAft>
               <a:buNone/>
             </a:pPr>
             <a:r>
-              <a:rPr lang="en-US" sz="2000" dirty="0">
+              <a:rPr lang="en-US" sz="2300" dirty="0">
                 <a:solidFill>
                   <a:srgbClr val="141B26"/>
                 </a:solidFill>
               </a:rPr>
               <a:t>3. Suggest one other reason why monarch numbers could fall.</a:t>
             </a:r>
-            <a:endParaRPr lang="en-US" sz="2000" dirty="0"/>
+            <a:endParaRPr lang="en-US" sz="2300" dirty="0"/>
           </a:p>
         </p:txBody>
       </p:sp>
@@ -5924,7 +5886,7 @@
         <p:spPr>
           <a:xfrm>
             <a:off x="6858000" y="4720590"/>
-            <a:ext cx="4754880" cy="502920"/>
+            <a:ext cx="4754880" cy="548640"/>
           </a:xfrm>
           <a:prstGeom prst="rect">
             <a:avLst/>
@@ -5940,7 +5902,7 @@
               <a:buNone/>
             </a:pPr>
             <a:r>
-              <a:rPr lang="en-US" sz="1100" dirty="0">
+              <a:rPr lang="en-US" sz="1300" dirty="0">
                 <a:solidFill>
                   <a:srgbClr val="141B26"/>
                 </a:solidFill>
@@ -5950,21 +5912,21 @@
             <a:pPr algn="l" indent="0" marL="0">
               <a:buNone/>
             </a:pPr>
-            <a:endParaRPr lang="en-US" sz="1100" dirty="0"/>
+            <a:endParaRPr lang="en-US" sz="1300" dirty="0"/>
           </a:p>
           <a:p>
             <a:pPr algn="l" indent="0" marL="0">
               <a:buNone/>
             </a:pPr>
             <a:r>
-              <a:rPr lang="en-US" sz="800" dirty="0">
+              <a:rPr lang="en-US" sz="900" dirty="0">
                 <a:solidFill>
                   <a:srgbClr val="5B6574"/>
                 </a:solidFill>
               </a:rPr>
               <a:t>Image: sillarsclass, CC BY 2.0, via Wikimedia Commons</a:t>
             </a:r>
-            <a:endParaRPr lang="en-US" sz="1100" dirty="0"/>
+            <a:endParaRPr lang="en-US" sz="1300" dirty="0"/>
           </a:p>
         </p:txBody>
       </p:sp>
@@ -6147,8 +6109,8 @@
         </p:nvSpPr>
         <p:spPr>
           <a:xfrm>
-            <a:off x="548640" y="1325880"/>
-            <a:ext cx="5669280" cy="457200"/>
+            <a:off x="548640" y="1280160"/>
+            <a:ext cx="5486400" cy="411480"/>
           </a:xfrm>
           <a:prstGeom prst="rect">
             <a:avLst/>
@@ -6164,14 +6126,14 @@
               <a:buNone/>
             </a:pPr>
             <a:r>
-              <a:rPr lang="en-US" sz="2000" b="1" dirty="0">
+              <a:rPr lang="en-US" sz="2200" b="1" dirty="0">
                 <a:solidFill>
                   <a:srgbClr val="7B3A8E"/>
                 </a:solidFill>
               </a:rPr>
               <a:t>Today I can ...</a:t>
             </a:r>
-            <a:endParaRPr lang="en-US" sz="2000" dirty="0"/>
+            <a:endParaRPr lang="en-US" sz="2200" dirty="0"/>
           </a:p>
         </p:txBody>
       </p:sp>
@@ -6183,8 +6145,8 @@
         </p:nvSpPr>
         <p:spPr>
           <a:xfrm>
-            <a:off x="594360" y="1947672"/>
-            <a:ext cx="292608" cy="292608"/>
+            <a:off x="594360" y="1810512"/>
+            <a:ext cx="310896" cy="310896"/>
           </a:xfrm>
           <a:prstGeom prst="rect">
             <a:avLst/>
@@ -6208,8 +6170,8 @@
         </p:nvSpPr>
         <p:spPr>
           <a:xfrm>
-            <a:off x="1051560" y="1874520"/>
-            <a:ext cx="5120640" cy="868680"/>
+            <a:off x="1097280" y="1737360"/>
+            <a:ext cx="10332720" cy="868680"/>
           </a:xfrm>
           <a:prstGeom prst="rect">
             <a:avLst/>
@@ -6218,23 +6180,21 @@
           <a:ln/>
         </p:spPr>
         <p:txBody>
-          <a:bodyPr wrap="square" lIns="0" tIns="0" rIns="0" bIns="0" rtlCol="0" anchor="t">
-            <a:normAutofit/>
-          </a:bodyPr>
+          <a:bodyPr wrap="square" lIns="0" tIns="0" rIns="0" bIns="0" rtlCol="0" anchor="t"/>
           <a:lstStyle/>
           <a:p>
             <a:pPr indent="0" marL="0">
               <a:buNone/>
             </a:pPr>
             <a:r>
-              <a:rPr lang="en-US" sz="1600" dirty="0">
+              <a:rPr lang="en-US" sz="2000" dirty="0">
                 <a:solidFill>
                   <a:srgbClr val="141B26"/>
                 </a:solidFill>
               </a:rPr>
               <a:t>I can identify bias in graphs and arguments, explain where accidental bias comes from, and say whether a conclusion is valid.</a:t>
             </a:r>
-            <a:endParaRPr lang="en-US" sz="1600" dirty="0"/>
+            <a:endParaRPr lang="en-US" sz="2000" dirty="0"/>
           </a:p>
         </p:txBody>
       </p:sp>
@@ -6246,8 +6206,8 @@
         </p:nvSpPr>
         <p:spPr>
           <a:xfrm>
-            <a:off x="594360" y="2907792"/>
-            <a:ext cx="292608" cy="292608"/>
+            <a:off x="594360" y="2679192"/>
+            <a:ext cx="310896" cy="310896"/>
           </a:xfrm>
           <a:prstGeom prst="rect">
             <a:avLst/>
@@ -6271,8 +6231,8 @@
         </p:nvSpPr>
         <p:spPr>
           <a:xfrm>
-            <a:off x="1051560" y="2834640"/>
-            <a:ext cx="5120640" cy="868680"/>
+            <a:off x="1097280" y="2606040"/>
+            <a:ext cx="10332720" cy="868680"/>
           </a:xfrm>
           <a:prstGeom prst="rect">
             <a:avLst/>
@@ -6281,23 +6241,21 @@
           <a:ln/>
         </p:spPr>
         <p:txBody>
-          <a:bodyPr wrap="square" lIns="0" tIns="0" rIns="0" bIns="0" rtlCol="0" anchor="t">
-            <a:normAutofit/>
-          </a:bodyPr>
+          <a:bodyPr wrap="square" lIns="0" tIns="0" rIns="0" bIns="0" rtlCol="0" anchor="t"/>
           <a:lstStyle/>
           <a:p>
             <a:pPr indent="0" marL="0">
               <a:buNone/>
             </a:pPr>
             <a:r>
-              <a:rPr lang="en-US" sz="1600" dirty="0">
+              <a:rPr lang="en-US" sz="2000" dirty="0">
                 <a:solidFill>
                   <a:srgbClr val="141B26"/>
                 </a:solidFill>
               </a:rPr>
               <a:t>I can compare organic and intensive farming and explain biological control.</a:t>
             </a:r>
-            <a:endParaRPr lang="en-US" sz="1600" dirty="0"/>
+            <a:endParaRPr lang="en-US" sz="2000" dirty="0"/>
           </a:p>
         </p:txBody>
       </p:sp>
@@ -6309,8 +6267,8 @@
         </p:nvSpPr>
         <p:spPr>
           <a:xfrm>
-            <a:off x="6583680" y="1325880"/>
-            <a:ext cx="5029200" cy="457200"/>
+            <a:off x="548640" y="3611880"/>
+            <a:ext cx="5486400" cy="411480"/>
           </a:xfrm>
           <a:prstGeom prst="rect">
             <a:avLst/>
@@ -6326,14 +6284,14 @@
               <a:buNone/>
             </a:pPr>
             <a:r>
-              <a:rPr lang="en-US" sz="2000" b="1" dirty="0">
+              <a:rPr lang="en-US" sz="2200" b="1" dirty="0">
                 <a:solidFill>
                   <a:srgbClr val="7B3A8E"/>
                 </a:solidFill>
               </a:rPr>
               <a:t>Key words today</a:t>
             </a:r>
-            <a:endParaRPr lang="en-US" sz="2000" dirty="0"/>
+            <a:endParaRPr lang="en-US" sz="2200" dirty="0"/>
           </a:p>
         </p:txBody>
       </p:sp>
@@ -6345,8 +6303,8 @@
         </p:nvSpPr>
         <p:spPr>
           <a:xfrm>
-            <a:off x="6583680" y="1874520"/>
-            <a:ext cx="5029200" cy="4023360"/>
+            <a:off x="548640" y="4069080"/>
+            <a:ext cx="3515258" cy="1920240"/>
           </a:xfrm>
           <a:prstGeom prst="rect">
             <a:avLst/>
@@ -6355,350 +6313,285 @@
           <a:ln/>
         </p:spPr>
         <p:txBody>
-          <a:bodyPr wrap="square" lIns="0" tIns="0" rIns="0" bIns="0" rtlCol="0" anchor="t">
-            <a:normAutofit/>
-          </a:bodyPr>
+          <a:bodyPr wrap="square" lIns="0" tIns="0" rIns="0" bIns="0" rtlCol="0" anchor="t"/>
+          <a:lstStyle/>
+          <a:p>
+            <a:pPr marL="304800" indent="-304800">
+              <a:spcAft>
+                <a:spcPts val="600"/>
+              </a:spcAft>
+              <a:buSzPct val="100000"/>
+              <a:buChar char="•"/>
+            </a:pPr>
+            <a:r>
+              <a:rPr lang="en-US" sz="2100" b="1" dirty="0">
+                <a:solidFill>
+                  <a:srgbClr val="0F2A5F"/>
+                </a:solidFill>
+              </a:rPr>
+              <a:t>bias</a:t>
+            </a:r>
+            <a:endParaRPr lang="en-US" sz="2100" dirty="0"/>
+          </a:p>
+          <a:p>
+            <a:pPr marL="304800" indent="-304800">
+              <a:spcAft>
+                <a:spcPts val="600"/>
+              </a:spcAft>
+              <a:buSzPct val="100000"/>
+              <a:buChar char="•"/>
+            </a:pPr>
+            <a:r>
+              <a:rPr lang="en-US" sz="2100" b="1" dirty="0">
+                <a:solidFill>
+                  <a:srgbClr val="0F2A5F"/>
+                </a:solidFill>
+              </a:rPr>
+              <a:t>balanced</a:t>
+            </a:r>
+            <a:endParaRPr lang="en-US" sz="2100" dirty="0"/>
+          </a:p>
+          <a:p>
+            <a:pPr marL="304800" indent="-304800">
+              <a:spcAft>
+                <a:spcPts val="600"/>
+              </a:spcAft>
+              <a:buSzPct val="100000"/>
+              <a:buChar char="•"/>
+            </a:pPr>
+            <a:r>
+              <a:rPr lang="en-US" sz="2100" b="1" dirty="0">
+                <a:solidFill>
+                  <a:srgbClr val="0F2A5F"/>
+                </a:solidFill>
+              </a:rPr>
+              <a:t>systematic error</a:t>
+            </a:r>
+            <a:endParaRPr lang="en-US" sz="2100" dirty="0"/>
+          </a:p>
+          <a:p>
+            <a:pPr marL="304800" indent="-304800">
+              <a:spcAft>
+                <a:spcPts val="600"/>
+              </a:spcAft>
+              <a:buSzPct val="100000"/>
+              <a:buChar char="•"/>
+            </a:pPr>
+            <a:r>
+              <a:rPr lang="en-US" sz="2100" b="1" dirty="0">
+                <a:solidFill>
+                  <a:srgbClr val="0F2A5F"/>
+                </a:solidFill>
+              </a:rPr>
+              <a:t>random error</a:t>
+            </a:r>
+            <a:endParaRPr lang="en-US" sz="2100" dirty="0"/>
+          </a:p>
+        </p:txBody>
+      </p:sp>
+      <p:sp>
+        <p:nvSpPr>
+          <p:cNvPr id="12" name="Text 10"/>
+          <p:cNvSpPr txBox="1"/>
+          <p:nvPr/>
+        </p:nvSpPr>
+        <p:spPr>
+          <a:xfrm>
+            <a:off x="4338218" y="4069080"/>
+            <a:ext cx="3515258" cy="1920240"/>
+          </a:xfrm>
+          <a:prstGeom prst="rect">
+            <a:avLst/>
+          </a:prstGeom>
+          <a:noFill/>
+          <a:ln/>
+        </p:spPr>
+        <p:txBody>
+          <a:bodyPr wrap="square" lIns="0" tIns="0" rIns="0" bIns="0" rtlCol="0" anchor="t"/>
+          <a:lstStyle/>
+          <a:p>
+            <a:pPr marL="304800" indent="-304800">
+              <a:spcAft>
+                <a:spcPts val="600"/>
+              </a:spcAft>
+              <a:buSzPct val="100000"/>
+              <a:buChar char="•"/>
+            </a:pPr>
+            <a:r>
+              <a:rPr lang="en-US" sz="2100" b="1" dirty="0">
+                <a:solidFill>
+                  <a:srgbClr val="0F2A5F"/>
+                </a:solidFill>
+              </a:rPr>
+              <a:t>sample</a:t>
+            </a:r>
+            <a:endParaRPr lang="en-US" sz="2100" dirty="0"/>
+          </a:p>
+          <a:p>
+            <a:pPr marL="304800" indent="-304800">
+              <a:spcAft>
+                <a:spcPts val="600"/>
+              </a:spcAft>
+              <a:buSzPct val="100000"/>
+              <a:buChar char="•"/>
+            </a:pPr>
+            <a:r>
+              <a:rPr lang="en-US" sz="2100" b="1" dirty="0">
+                <a:solidFill>
+                  <a:srgbClr val="0F2A5F"/>
+                </a:solidFill>
+              </a:rPr>
+              <a:t>valid</a:t>
+            </a:r>
+            <a:endParaRPr lang="en-US" sz="2100" dirty="0"/>
+          </a:p>
+          <a:p>
+            <a:pPr marL="304800" indent="-304800">
+              <a:spcAft>
+                <a:spcPts val="600"/>
+              </a:spcAft>
+              <a:buSzPct val="100000"/>
+              <a:buChar char="•"/>
+            </a:pPr>
+            <a:r>
+              <a:rPr lang="en-US" sz="2100" b="1" dirty="0">
+                <a:solidFill>
+                  <a:srgbClr val="0F2A5F"/>
+                </a:solidFill>
+              </a:rPr>
+              <a:t>conclusion</a:t>
+            </a:r>
+            <a:endParaRPr lang="en-US" sz="2100" dirty="0"/>
+          </a:p>
+          <a:p>
+            <a:pPr marL="304800" indent="-304800">
+              <a:spcAft>
+                <a:spcPts val="600"/>
+              </a:spcAft>
+              <a:buSzPct val="100000"/>
+              <a:buChar char="•"/>
+            </a:pPr>
+            <a:r>
+              <a:rPr lang="en-US" sz="2100" b="1" dirty="0">
+                <a:solidFill>
+                  <a:srgbClr val="0F2A5F"/>
+                </a:solidFill>
+              </a:rPr>
+              <a:t>organic farming</a:t>
+            </a:r>
+            <a:endParaRPr lang="en-US" sz="2100" dirty="0"/>
+          </a:p>
+        </p:txBody>
+      </p:sp>
+      <p:sp>
+        <p:nvSpPr>
+          <p:cNvPr id="13" name="Text 11"/>
+          <p:cNvSpPr txBox="1"/>
+          <p:nvPr/>
+        </p:nvSpPr>
+        <p:spPr>
+          <a:xfrm>
+            <a:off x="8127797" y="4069080"/>
+            <a:ext cx="3515258" cy="1920240"/>
+          </a:xfrm>
+          <a:prstGeom prst="rect">
+            <a:avLst/>
+          </a:prstGeom>
+          <a:noFill/>
+          <a:ln/>
+        </p:spPr>
+        <p:txBody>
+          <a:bodyPr wrap="square" lIns="0" tIns="0" rIns="0" bIns="0" rtlCol="0" anchor="t"/>
+          <a:lstStyle/>
+          <a:p>
+            <a:pPr marL="304800" indent="-304800">
+              <a:spcAft>
+                <a:spcPts val="600"/>
+              </a:spcAft>
+              <a:buSzPct val="100000"/>
+              <a:buChar char="•"/>
+            </a:pPr>
+            <a:r>
+              <a:rPr lang="en-US" sz="2200" b="1" dirty="0">
+                <a:solidFill>
+                  <a:srgbClr val="0F2A5F"/>
+                </a:solidFill>
+              </a:rPr>
+              <a:t>intensive farming</a:t>
+            </a:r>
+            <a:endParaRPr lang="en-US" sz="2200" dirty="0"/>
+          </a:p>
+          <a:p>
+            <a:pPr marL="304800" indent="-304800">
+              <a:spcAft>
+                <a:spcPts val="600"/>
+              </a:spcAft>
+              <a:buSzPct val="100000"/>
+              <a:buChar char="•"/>
+            </a:pPr>
+            <a:r>
+              <a:rPr lang="en-US" sz="2200" b="1" dirty="0">
+                <a:solidFill>
+                  <a:srgbClr val="0F2A5F"/>
+                </a:solidFill>
+              </a:rPr>
+              <a:t>biological control</a:t>
+            </a:r>
+            <a:endParaRPr lang="en-US" sz="2200" dirty="0"/>
+          </a:p>
+          <a:p>
+            <a:pPr marL="304800" indent="-304800">
+              <a:spcAft>
+                <a:spcPts val="600"/>
+              </a:spcAft>
+              <a:buSzPct val="100000"/>
+              <a:buChar char="•"/>
+            </a:pPr>
+            <a:r>
+              <a:rPr lang="en-US" sz="2200" b="1" dirty="0">
+                <a:solidFill>
+                  <a:srgbClr val="0F2A5F"/>
+                </a:solidFill>
+              </a:rPr>
+              <a:t>crop rotation</a:t>
+            </a:r>
+            <a:endParaRPr lang="en-US" sz="2200" dirty="0"/>
+          </a:p>
+        </p:txBody>
+      </p:sp>
+      <p:sp>
+        <p:nvSpPr>
+          <p:cNvPr id="14" name="Text 12"/>
+          <p:cNvSpPr txBox="1"/>
+          <p:nvPr/>
+        </p:nvSpPr>
+        <p:spPr>
+          <a:xfrm>
+            <a:off x="548640" y="6035040"/>
+            <a:ext cx="10881360" cy="320040"/>
+          </a:xfrm>
+          <a:prstGeom prst="rect">
+            <a:avLst/>
+          </a:prstGeom>
+          <a:noFill/>
+          <a:ln/>
+        </p:spPr>
+        <p:txBody>
+          <a:bodyPr wrap="square" lIns="0" tIns="0" rIns="0" bIns="0" rtlCol="0" anchor="ctr"/>
           <a:lstStyle/>
           <a:p>
             <a:pPr indent="0" marL="0">
-              <a:spcAft>
-                <a:spcPts val="500"/>
-              </a:spcAft>
-              <a:buNone/>
-            </a:pPr>
-            <a:r>
-              <a:rPr lang="en-US" sz="1300" b="1" dirty="0">
-                <a:solidFill>
-                  <a:srgbClr val="0F2A5F"/>
-                </a:solidFill>
-              </a:rPr>
-              <a:t>bias</a:t>
-            </a:r>
-            <a:pPr indent="0" marL="0">
-              <a:spcAft>
-                <a:spcPts val="500"/>
-              </a:spcAft>
-              <a:buNone/>
-            </a:pPr>
-            <a:r>
-              <a:rPr lang="en-US" sz="1300" dirty="0">
-                <a:solidFill>
-                  <a:srgbClr val="141B26"/>
-                </a:solidFill>
-              </a:rPr>
-              <a:t>  a shift away from the true meaning or value, on purpose or by mistake</a:t>
-            </a:r>
-            <a:endParaRPr lang="en-US" sz="1300" dirty="0"/>
-          </a:p>
-          <a:p>
-            <a:pPr indent="0" marL="0">
-              <a:spcAft>
-                <a:spcPts val="500"/>
-              </a:spcAft>
-              <a:buNone/>
-            </a:pPr>
-            <a:r>
-              <a:rPr lang="en-US" sz="1300" b="1" dirty="0">
-                <a:solidFill>
-                  <a:srgbClr val="0F2A5F"/>
-                </a:solidFill>
-              </a:rPr>
-              <a:t>balanced</a:t>
-            </a:r>
-            <a:pPr indent="0" marL="0">
-              <a:spcAft>
-                <a:spcPts val="500"/>
-              </a:spcAft>
-              <a:buNone/>
-            </a:pPr>
-            <a:r>
-              <a:rPr lang="en-US" sz="1300" dirty="0">
-                <a:solidFill>
-                  <a:srgbClr val="141B26"/>
-                </a:solidFill>
-              </a:rPr>
-              <a:t>  considering the points for and against something equally</a:t>
-            </a:r>
-            <a:endParaRPr lang="en-US" sz="1300" dirty="0"/>
-          </a:p>
-          <a:p>
-            <a:pPr indent="0" marL="0">
-              <a:spcAft>
-                <a:spcPts val="500"/>
-              </a:spcAft>
-              <a:buNone/>
-            </a:pPr>
-            <a:r>
-              <a:rPr lang="en-US" sz="1300" b="1" dirty="0">
-                <a:solidFill>
-                  <a:srgbClr val="0F2A5F"/>
-                </a:solidFill>
-              </a:rPr>
-              <a:t>systematic error</a:t>
-            </a:r>
-            <a:pPr indent="0" marL="0">
-              <a:spcAft>
-                <a:spcPts val="500"/>
-              </a:spcAft>
-              <a:buNone/>
-            </a:pPr>
-            <a:r>
-              <a:rPr lang="en-US" sz="1300" dirty="0">
-                <a:solidFill>
-                  <a:srgbClr val="141B26"/>
-                </a:solidFill>
-              </a:rPr>
-              <a:t>  an error that shifts every reading by the same amount, e.g. a wrongly printed scale</a:t>
-            </a:r>
-            <a:endParaRPr lang="en-US" sz="1300" dirty="0"/>
-          </a:p>
-          <a:p>
-            <a:pPr indent="0" marL="0">
-              <a:spcAft>
-                <a:spcPts val="500"/>
-              </a:spcAft>
-              <a:buNone/>
-            </a:pPr>
-            <a:r>
-              <a:rPr lang="en-US" sz="1300" b="1" dirty="0">
-                <a:solidFill>
-                  <a:srgbClr val="0F2A5F"/>
-                </a:solidFill>
-              </a:rPr>
-              <a:t>random error</a:t>
-            </a:r>
-            <a:pPr indent="0" marL="0">
-              <a:spcAft>
-                <a:spcPts val="500"/>
-              </a:spcAft>
-              <a:buNone/>
-            </a:pPr>
-            <a:r>
-              <a:rPr lang="en-US" sz="1300" dirty="0">
-                <a:solidFill>
-                  <a:srgbClr val="141B26"/>
-                </a:solidFill>
-              </a:rPr>
-              <a:t>  an error that changes from one reading to the next, e.g. stopping a clock late once</a:t>
-            </a:r>
-            <a:endParaRPr lang="en-US" sz="1300" dirty="0"/>
-          </a:p>
-          <a:p>
-            <a:pPr indent="0" marL="0">
-              <a:spcAft>
-                <a:spcPts val="500"/>
-              </a:spcAft>
-              <a:buNone/>
-            </a:pPr>
-            <a:r>
-              <a:rPr lang="en-US" sz="1300" b="1" dirty="0">
-                <a:solidFill>
-                  <a:srgbClr val="0F2A5F"/>
-                </a:solidFill>
-              </a:rPr>
-              <a:t>sample</a:t>
-            </a:r>
-            <a:pPr indent="0" marL="0">
-              <a:spcAft>
-                <a:spcPts val="500"/>
-              </a:spcAft>
-              <a:buNone/>
-            </a:pPr>
-            <a:r>
-              <a:rPr lang="en-US" sz="1300" dirty="0">
-                <a:solidFill>
-                  <a:srgbClr val="141B26"/>
-                </a:solidFill>
-              </a:rPr>
-              <a:t>  a small part of a whole that is measured to estimate the whole</a:t>
-            </a:r>
-            <a:endParaRPr lang="en-US" sz="1300" dirty="0"/>
-          </a:p>
-          <a:p>
-            <a:pPr indent="0" marL="0">
-              <a:spcAft>
-                <a:spcPts val="500"/>
-              </a:spcAft>
-              <a:buNone/>
-            </a:pPr>
-            <a:r>
-              <a:rPr lang="en-US" sz="1300" b="1" dirty="0">
-                <a:solidFill>
-                  <a:srgbClr val="0F2A5F"/>
-                </a:solidFill>
-              </a:rPr>
-              <a:t>valid</a:t>
-            </a:r>
-            <a:pPr indent="0" marL="0">
-              <a:spcAft>
-                <a:spcPts val="500"/>
-              </a:spcAft>
-              <a:buNone/>
-            </a:pPr>
-            <a:r>
-              <a:rPr lang="en-US" sz="1300" dirty="0">
-                <a:solidFill>
-                  <a:srgbClr val="141B26"/>
-                </a:solidFill>
-              </a:rPr>
-              <a:t>  does what it is supposed to do; a valid conclusion uses only the results</a:t>
-            </a:r>
-            <a:endParaRPr lang="en-US" sz="1300" dirty="0"/>
-          </a:p>
-          <a:p>
-            <a:pPr indent="0" marL="0">
-              <a:spcAft>
-                <a:spcPts val="500"/>
-              </a:spcAft>
-              <a:buNone/>
-            </a:pPr>
-            <a:r>
-              <a:rPr lang="en-US" sz="1300" b="1" dirty="0">
-                <a:solidFill>
-                  <a:srgbClr val="0F2A5F"/>
-                </a:solidFill>
-              </a:rPr>
-              <a:t>conclusion</a:t>
-            </a:r>
-            <a:pPr indent="0" marL="0">
-              <a:spcAft>
-                <a:spcPts val="500"/>
-              </a:spcAft>
-              <a:buNone/>
-            </a:pPr>
-            <a:r>
-              <a:rPr lang="en-US" sz="1300" dirty="0">
-                <a:solidFill>
-                  <a:srgbClr val="141B26"/>
-                </a:solidFill>
-              </a:rPr>
-              <a:t>  what the results of an investigation show</a:t>
-            </a:r>
-            <a:endParaRPr lang="en-US" sz="1300" dirty="0"/>
-          </a:p>
-          <a:p>
-            <a:pPr indent="0" marL="0">
-              <a:spcAft>
-                <a:spcPts val="500"/>
-              </a:spcAft>
-              <a:buNone/>
-            </a:pPr>
-            <a:r>
-              <a:rPr lang="en-US" sz="1300" b="1" dirty="0">
-                <a:solidFill>
-                  <a:srgbClr val="0F2A5F"/>
-                </a:solidFill>
-              </a:rPr>
-              <a:t>organic farming</a:t>
-            </a:r>
-            <a:pPr indent="0" marL="0">
-              <a:spcAft>
-                <a:spcPts val="500"/>
-              </a:spcAft>
-              <a:buNone/>
-            </a:pPr>
-            <a:r>
-              <a:rPr lang="en-US" sz="1300" dirty="0">
-                <a:solidFill>
-                  <a:srgbClr val="141B26"/>
-                </a:solidFill>
-              </a:rPr>
-              <a:t>  farming with natural fertilisers, very few pesticides and crop rotation</a:t>
-            </a:r>
-            <a:endParaRPr lang="en-US" sz="1300" dirty="0"/>
-          </a:p>
-          <a:p>
-            <a:pPr indent="0" marL="0">
-              <a:spcAft>
-                <a:spcPts val="500"/>
-              </a:spcAft>
-              <a:buNone/>
-            </a:pPr>
-            <a:r>
-              <a:rPr lang="en-US" sz="1300" b="1" dirty="0">
-                <a:solidFill>
-                  <a:srgbClr val="0F2A5F"/>
-                </a:solidFill>
-              </a:rPr>
-              <a:t>intensive farming</a:t>
-            </a:r>
-            <a:pPr indent="0" marL="0">
-              <a:spcAft>
-                <a:spcPts val="500"/>
-              </a:spcAft>
-              <a:buNone/>
-            </a:pPr>
-            <a:r>
-              <a:rPr lang="en-US" sz="1300" dirty="0">
-                <a:solidFill>
-                  <a:srgbClr val="141B26"/>
-                </a:solidFill>
-              </a:rPr>
-              <a:t>  farming with artificial fertilisers, pesticides and large fields to get the biggest yield</a:t>
-            </a:r>
-            <a:endParaRPr lang="en-US" sz="1300" dirty="0"/>
-          </a:p>
-          <a:p>
-            <a:pPr indent="0" marL="0">
-              <a:spcAft>
-                <a:spcPts val="500"/>
-              </a:spcAft>
-              <a:buNone/>
-            </a:pPr>
-            <a:r>
-              <a:rPr lang="en-US" sz="1300" b="1" dirty="0">
-                <a:solidFill>
-                  <a:srgbClr val="0F2A5F"/>
-                </a:solidFill>
-              </a:rPr>
-              <a:t>biological control</a:t>
-            </a:r>
-            <a:pPr indent="0" marL="0">
-              <a:spcAft>
-                <a:spcPts val="500"/>
-              </a:spcAft>
-              <a:buNone/>
-            </a:pPr>
-            <a:r>
-              <a:rPr lang="en-US" sz="1300" dirty="0">
-                <a:solidFill>
-                  <a:srgbClr val="141B26"/>
-                </a:solidFill>
-              </a:rPr>
-              <a:t>  using living organisms to reduce the number of pests</a:t>
-            </a:r>
-            <a:endParaRPr lang="en-US" sz="1300" dirty="0"/>
-          </a:p>
-          <a:p>
-            <a:pPr indent="0" marL="0">
-              <a:spcAft>
-                <a:spcPts val="500"/>
-              </a:spcAft>
-              <a:buNone/>
-            </a:pPr>
-            <a:r>
-              <a:rPr lang="en-US" sz="1300" b="1" dirty="0">
-                <a:solidFill>
-                  <a:srgbClr val="0F2A5F"/>
-                </a:solidFill>
-              </a:rPr>
-              <a:t>crop rotation</a:t>
-            </a:r>
-            <a:pPr indent="0" marL="0">
-              <a:spcAft>
-                <a:spcPts val="500"/>
-              </a:spcAft>
-              <a:buNone/>
-            </a:pPr>
-            <a:r>
-              <a:rPr lang="en-US" sz="1300" dirty="0">
-                <a:solidFill>
-                  <a:srgbClr val="141B26"/>
-                </a:solidFill>
-              </a:rPr>
-              <a:t>  growing different crops in a field in different years</a:t>
-            </a:r>
-            <a:endParaRPr lang="en-US" sz="1300" dirty="0"/>
+              <a:buNone/>
+            </a:pPr>
+            <a:r>
+              <a:rPr lang="en-US" sz="1400" i="1" dirty="0">
+                <a:solidFill>
+                  <a:srgbClr val="5B6574"/>
+                </a:solidFill>
+              </a:rPr>
+              <a:t>Meanings are in the key words box on your worksheet.</a:t>
+            </a:r>
+            <a:endParaRPr lang="en-US" sz="1400" dirty="0"/>
           </a:p>
         </p:txBody>
       </p:sp>
@@ -6882,7 +6775,7 @@
         <p:spPr>
           <a:xfrm>
             <a:off x="548640" y="1371600"/>
-            <a:ext cx="4297680" cy="2377440"/>
+            <a:ext cx="4297680" cy="2651760"/>
           </a:xfrm>
           <a:prstGeom prst="rect">
             <a:avLst/>
@@ -6891,23 +6784,21 @@
           <a:ln/>
         </p:spPr>
         <p:txBody>
-          <a:bodyPr wrap="square" lIns="0" tIns="0" rIns="0" bIns="0" rtlCol="0" anchor="t">
-            <a:normAutofit/>
-          </a:bodyPr>
+          <a:bodyPr wrap="square" lIns="0" tIns="0" rIns="0" bIns="0" rtlCol="0" anchor="t"/>
           <a:lstStyle/>
           <a:p>
             <a:pPr indent="0" marL="0">
               <a:buNone/>
             </a:pPr>
             <a:r>
-              <a:rPr lang="en-US" sz="2400" b="1" dirty="0">
+              <a:rPr lang="en-US" sz="2600" b="1" dirty="0">
                 <a:solidFill>
                   <a:srgbClr val="0F2A5F"/>
                 </a:solidFill>
               </a:rPr>
               <a:t>Both graphs come from the same counts of monarch butterflies in Mexico. What is graph C trying to make you believe? How did its author do it?</a:t>
             </a:r>
-            <a:endParaRPr lang="en-US" sz="2400" dirty="0"/>
+            <a:endParaRPr lang="en-US" sz="2600" dirty="0"/>
           </a:p>
         </p:txBody>
       </p:sp>
@@ -6919,8 +6810,8 @@
         </p:nvSpPr>
         <p:spPr>
           <a:xfrm>
-            <a:off x="548640" y="3794760"/>
-            <a:ext cx="4297680" cy="2103120"/>
+            <a:off x="548640" y="4114800"/>
+            <a:ext cx="4297680" cy="1828800"/>
           </a:xfrm>
           <a:prstGeom prst="rect">
             <a:avLst/>
@@ -6929,9 +6820,7 @@
           <a:ln/>
         </p:spPr>
         <p:txBody>
-          <a:bodyPr wrap="square" lIns="0" tIns="0" rIns="0" bIns="0" rtlCol="0" anchor="t">
-            <a:normAutofit/>
-          </a:bodyPr>
+          <a:bodyPr wrap="square" lIns="0" tIns="0" rIns="0" bIns="0" rtlCol="0" anchor="t"/>
           <a:lstStyle/>
           <a:p>
             <a:pPr indent="0" marL="0">
@@ -6941,14 +6830,14 @@
               <a:buNone/>
             </a:pPr>
             <a:r>
-              <a:rPr lang="en-US" sz="1600" dirty="0">
+              <a:rPr lang="en-US" sz="2000" dirty="0">
                 <a:solidFill>
                   <a:srgbClr val="141B26"/>
                 </a:solidFill>
               </a:rPr>
               <a:t>Talk to a partner. Which figures from graph B would you pick to show a steady fall?</a:t>
             </a:r>
-            <a:endParaRPr lang="en-US" sz="1600" dirty="0"/>
+            <a:endParaRPr lang="en-US" sz="2000" dirty="0"/>
           </a:p>
         </p:txBody>
       </p:sp>
@@ -6985,7 +6874,7 @@
         <p:spPr>
           <a:xfrm>
             <a:off x="5029200" y="4869180"/>
-            <a:ext cx="6583680" cy="502920"/>
+            <a:ext cx="6583680" cy="548640"/>
           </a:xfrm>
           <a:prstGeom prst="rect">
             <a:avLst/>
@@ -7001,14 +6890,14 @@
               <a:buNone/>
             </a:pPr>
             <a:r>
-              <a:rPr lang="en-US" sz="1100" dirty="0">
+              <a:rPr lang="en-US" sz="1300" dirty="0">
                 <a:solidFill>
                   <a:srgbClr val="141B26"/>
                 </a:solidFill>
               </a:rPr>
               <a:t>Graph B shows every year; graph C shows four of them</a:t>
             </a:r>
-            <a:endParaRPr lang="en-US" sz="1100" dirty="0"/>
+            <a:endParaRPr lang="en-US" sz="1300" dirty="0"/>
           </a:p>
         </p:txBody>
       </p:sp>
@@ -7191,8 +7080,8 @@
         </p:nvSpPr>
         <p:spPr>
           <a:xfrm>
-            <a:off x="548640" y="6053328"/>
-            <a:ext cx="9601200" cy="292608"/>
+            <a:off x="548640" y="6035040"/>
+            <a:ext cx="9601200" cy="310896"/>
           </a:xfrm>
           <a:prstGeom prst="rect">
             <a:avLst/>
@@ -7208,7 +7097,7 @@
               <a:buNone/>
             </a:pPr>
             <a:r>
-              <a:rPr lang="en-US" sz="1200" b="1" dirty="0">
+              <a:rPr lang="en-US" sz="1400" b="1" dirty="0">
                 <a:solidFill>
                   <a:srgbClr val="7B3A8E"/>
                 </a:solidFill>
@@ -7219,14 +7108,14 @@
               <a:buNone/>
             </a:pPr>
             <a:r>
-              <a:rPr lang="en-US" sz="1200" dirty="0">
+              <a:rPr lang="en-US" sz="1400" dirty="0">
                 <a:solidFill>
                   <a:srgbClr val="7B3A8E"/>
                 </a:solidFill>
               </a:rPr>
               <a:t>bias   ·   balanced</a:t>
             </a:r>
-            <a:endParaRPr lang="en-US" sz="1200" dirty="0"/>
+            <a:endParaRPr lang="en-US" sz="1400" dirty="0"/>
           </a:p>
         </p:txBody>
       </p:sp>
@@ -7248,99 +7137,97 @@
           <a:ln/>
         </p:spPr>
         <p:txBody>
-          <a:bodyPr wrap="square" lIns="0" tIns="0" rIns="0" bIns="0" rtlCol="0" anchor="t">
-            <a:normAutofit/>
-          </a:bodyPr>
-          <a:lstStyle/>
-          <a:p>
-            <a:pPr marL="228600" indent="-228600">
+          <a:bodyPr wrap="square" lIns="0" tIns="0" rIns="0" bIns="0" rtlCol="0" anchor="t"/>
+          <a:lstStyle/>
+          <a:p>
+            <a:pPr marL="304800" indent="-304800">
               <a:spcAft>
-                <a:spcPts val="600"/>
+                <a:spcPts val="800"/>
               </a:spcAft>
               <a:buSzPct val="100000"/>
               <a:buChar char="•"/>
             </a:pPr>
             <a:r>
-              <a:rPr lang="en-US" sz="1700" dirty="0">
+              <a:rPr lang="en-US" sz="2000" dirty="0">
                 <a:solidFill>
                   <a:srgbClr val="141B26"/>
                 </a:solidFill>
               </a:rPr>
               <a:t>Bias is a shift away from the true meaning or value. It can be deliberate or accidental.</a:t>
             </a:r>
-            <a:endParaRPr lang="en-US" sz="1700" dirty="0"/>
-          </a:p>
-          <a:p>
-            <a:pPr marL="228600" indent="-228600">
+            <a:endParaRPr lang="en-US" sz="2000" dirty="0"/>
+          </a:p>
+          <a:p>
+            <a:pPr marL="304800" indent="-304800">
               <a:spcAft>
-                <a:spcPts val="600"/>
+                <a:spcPts val="800"/>
               </a:spcAft>
               <a:buSzPct val="100000"/>
               <a:buChar char="•"/>
             </a:pPr>
             <a:r>
-              <a:rPr lang="en-US" sz="1700" dirty="0">
+              <a:rPr lang="en-US" sz="2000" dirty="0">
                 <a:solidFill>
                   <a:srgbClr val="141B26"/>
                 </a:solidFill>
               </a:rPr>
               <a:t>Intentional bias: choosing only the data that support your idea, like graph C.</a:t>
             </a:r>
-            <a:endParaRPr lang="en-US" sz="1700" dirty="0"/>
-          </a:p>
-          <a:p>
-            <a:pPr marL="228600" indent="-228600">
+            <a:endParaRPr lang="en-US" sz="2000" dirty="0"/>
+          </a:p>
+          <a:p>
+            <a:pPr marL="304800" indent="-304800">
               <a:spcAft>
-                <a:spcPts val="600"/>
+                <a:spcPts val="800"/>
               </a:spcAft>
               <a:buSzPct val="100000"/>
               <a:buChar char="•"/>
             </a:pPr>
             <a:r>
-              <a:rPr lang="en-US" sz="1700" dirty="0">
+              <a:rPr lang="en-US" sz="2000" dirty="0">
                 <a:solidFill>
                   <a:srgbClr val="141B26"/>
                 </a:solidFill>
               </a:rPr>
               <a:t>A balanced account considers the points for and against something equally.</a:t>
             </a:r>
-            <a:endParaRPr lang="en-US" sz="1700" dirty="0"/>
-          </a:p>
-          <a:p>
-            <a:pPr marL="228600" indent="-228600">
+            <a:endParaRPr lang="en-US" sz="2000" dirty="0"/>
+          </a:p>
+          <a:p>
+            <a:pPr marL="304800" indent="-304800">
               <a:spcAft>
-                <a:spcPts val="600"/>
+                <a:spcPts val="800"/>
               </a:spcAft>
               <a:buSzPct val="100000"/>
               <a:buChar char="•"/>
             </a:pPr>
             <a:r>
-              <a:rPr lang="en-US" sz="1700" dirty="0">
+              <a:rPr lang="en-US" sz="2000" dirty="0">
                 <a:solidFill>
                   <a:srgbClr val="141B26"/>
                 </a:solidFill>
               </a:rPr>
               <a:t>Bias also appears in words: an advert that lists only advantages is not balanced.</a:t>
             </a:r>
-            <a:endParaRPr lang="en-US" sz="1700" dirty="0"/>
-          </a:p>
-          <a:p>
-            <a:pPr marL="228600" indent="-228600">
+            <a:endParaRPr lang="en-US" sz="2000" dirty="0"/>
+          </a:p>
+          <a:p>
+            <a:pPr marL="304800" indent="-304800">
               <a:spcAft>
-                <a:spcPts val="600"/>
+                <a:spcPts val="800"/>
               </a:spcAft>
               <a:buSzPct val="100000"/>
               <a:buChar char="•"/>
             </a:pPr>
             <a:r>
-              <a:rPr lang="en-US" sz="1700" dirty="0">
+              <a:rPr lang="en-US" sz="2000" dirty="0">
                 <a:solidFill>
                   <a:srgbClr val="141B26"/>
                 </a:solidFill>
               </a:rPr>
               <a:t>Ask: who made this, and what do they want me to think?</a:t>
             </a:r>
-            <a:endParaRPr lang="en-US" sz="1700" dirty="0"/>
+            <a:endParaRPr lang="en-US" sz="2000" dirty="0"/>
           </a:p>
         </p:txBody>
       </p:sp>
@@ -7387,16 +7274,14 @@
           <a:ln/>
         </p:spPr>
         <p:txBody>
-          <a:bodyPr wrap="square" lIns="0" tIns="0" rIns="0" bIns="0" rtlCol="0" anchor="ctr">
-            <a:normAutofit/>
-          </a:bodyPr>
+          <a:bodyPr wrap="square" lIns="0" tIns="0" rIns="0" bIns="0" rtlCol="0" anchor="ctr"/>
           <a:lstStyle/>
           <a:p>
             <a:pPr indent="0" marL="0">
               <a:buNone/>
             </a:pPr>
             <a:r>
-              <a:rPr lang="en-US" sz="1400" b="1" dirty="0">
+              <a:rPr lang="en-US" sz="1700" b="1" dirty="0">
                 <a:solidFill>
                   <a:srgbClr val="7B3A8E"/>
                 </a:solidFill>
@@ -7407,14 +7292,14 @@
               <a:buNone/>
             </a:pPr>
             <a:r>
-              <a:rPr lang="en-US" sz="1400" dirty="0">
+              <a:rPr lang="en-US" sz="1700" dirty="0">
                 <a:solidFill>
                   <a:srgbClr val="141B26"/>
                 </a:solidFill>
               </a:rPr>
               <a:t>Selected data can show a pattern that the full data do not. Always ask what was left out.</a:t>
             </a:r>
-            <a:endParaRPr lang="en-US" sz="1400" dirty="0"/>
+            <a:endParaRPr lang="en-US" sz="1700" dirty="0"/>
           </a:p>
         </p:txBody>
       </p:sp>
@@ -7597,8 +7482,8 @@
         </p:nvSpPr>
         <p:spPr>
           <a:xfrm>
-            <a:off x="548640" y="6053328"/>
-            <a:ext cx="9601200" cy="292608"/>
+            <a:off x="548640" y="6035040"/>
+            <a:ext cx="9601200" cy="310896"/>
           </a:xfrm>
           <a:prstGeom prst="rect">
             <a:avLst/>
@@ -7614,7 +7499,7 @@
               <a:buNone/>
             </a:pPr>
             <a:r>
-              <a:rPr lang="en-US" sz="1200" b="1" dirty="0">
+              <a:rPr lang="en-US" sz="1400" b="1" dirty="0">
                 <a:solidFill>
                   <a:srgbClr val="7B3A8E"/>
                 </a:solidFill>
@@ -7625,14 +7510,14 @@
               <a:buNone/>
             </a:pPr>
             <a:r>
-              <a:rPr lang="en-US" sz="1200" dirty="0">
+              <a:rPr lang="en-US" sz="1400" dirty="0">
                 <a:solidFill>
                   <a:srgbClr val="7B3A8E"/>
                 </a:solidFill>
               </a:rPr>
               <a:t>systematic error   ·   random error   ·   sample</a:t>
             </a:r>
-            <a:endParaRPr lang="en-US" sz="1200" dirty="0"/>
+            <a:endParaRPr lang="en-US" sz="1400" dirty="0"/>
           </a:p>
         </p:txBody>
       </p:sp>
@@ -7688,14 +7573,14 @@
               <a:buNone/>
             </a:pPr>
             <a:r>
-              <a:rPr lang="en-US" sz="2000" b="1" dirty="0">
+              <a:rPr lang="en-US" sz="2200" b="1" dirty="0">
                 <a:solidFill>
                   <a:srgbClr val="0F2A5F"/>
                 </a:solidFill>
               </a:rPr>
               <a:t>Systematic error</a:t>
             </a:r>
-            <a:endParaRPr lang="en-US" sz="2000" dirty="0"/>
+            <a:endParaRPr lang="en-US" sz="2200" dirty="0"/>
           </a:p>
         </p:txBody>
       </p:sp>
@@ -7717,81 +7602,79 @@
           <a:ln/>
         </p:spPr>
         <p:txBody>
-          <a:bodyPr wrap="square" lIns="0" tIns="0" rIns="0" bIns="0" rtlCol="0" anchor="t">
-            <a:normAutofit/>
-          </a:bodyPr>
-          <a:lstStyle/>
-          <a:p>
-            <a:pPr marL="228600" indent="-228600">
+          <a:bodyPr wrap="square" lIns="0" tIns="0" rIns="0" bIns="0" rtlCol="0" anchor="t"/>
+          <a:lstStyle/>
+          <a:p>
+            <a:pPr marL="304800" indent="-304800">
               <a:spcAft>
-                <a:spcPts val="600"/>
+                <a:spcPts val="800"/>
               </a:spcAft>
               <a:buSzPct val="100000"/>
               <a:buChar char="•"/>
             </a:pPr>
             <a:r>
-              <a:rPr lang="en-US" sz="1500" dirty="0">
+              <a:rPr lang="en-US" sz="1800" dirty="0">
                 <a:solidFill>
                   <a:srgbClr val="141B26"/>
                 </a:solidFill>
               </a:rPr>
               <a:t>Every reading is shifted by the same amount.</a:t>
             </a:r>
-            <a:endParaRPr lang="en-US" sz="1500" dirty="0"/>
-          </a:p>
-          <a:p>
-            <a:pPr marL="228600" indent="-228600">
+            <a:endParaRPr lang="en-US" sz="1800" dirty="0"/>
+          </a:p>
+          <a:p>
+            <a:pPr marL="304800" indent="-304800">
               <a:spcAft>
-                <a:spcPts val="600"/>
+                <a:spcPts val="800"/>
               </a:spcAft>
               <a:buSzPct val="100000"/>
               <a:buChar char="•"/>
             </a:pPr>
             <a:r>
-              <a:rPr lang="en-US" sz="1500" dirty="0">
+              <a:rPr lang="en-US" sz="1800" dirty="0">
                 <a:solidFill>
                   <a:srgbClr val="141B26"/>
                 </a:solidFill>
               </a:rPr>
               <a:t>A thermometer with a wrongly printed scale reads 1 °C too high every time.</a:t>
             </a:r>
-            <a:endParaRPr lang="en-US" sz="1500" dirty="0"/>
-          </a:p>
-          <a:p>
-            <a:pPr marL="228600" indent="-228600">
+            <a:endParaRPr lang="en-US" sz="1800" dirty="0"/>
+          </a:p>
+          <a:p>
+            <a:pPr marL="304800" indent="-304800">
               <a:spcAft>
-                <a:spcPts val="600"/>
+                <a:spcPts val="800"/>
               </a:spcAft>
               <a:buSzPct val="100000"/>
               <a:buChar char="•"/>
             </a:pPr>
             <a:r>
-              <a:rPr lang="en-US" sz="1500" dirty="0">
+              <a:rPr lang="en-US" sz="1800" dirty="0">
                 <a:solidFill>
                   <a:srgbClr val="141B26"/>
                 </a:solidFill>
               </a:rPr>
               <a:t>A mass balance not set to zero.</a:t>
             </a:r>
-            <a:endParaRPr lang="en-US" sz="1500" dirty="0"/>
-          </a:p>
-          <a:p>
-            <a:pPr marL="228600" indent="-228600">
+            <a:endParaRPr lang="en-US" sz="1800" dirty="0"/>
+          </a:p>
+          <a:p>
+            <a:pPr marL="304800" indent="-304800">
               <a:spcAft>
-                <a:spcPts val="600"/>
+                <a:spcPts val="800"/>
               </a:spcAft>
               <a:buSzPct val="100000"/>
               <a:buChar char="•"/>
             </a:pPr>
             <a:r>
-              <a:rPr lang="en-US" sz="1500" dirty="0">
+              <a:rPr lang="en-US" sz="1800" dirty="0">
                 <a:solidFill>
                   <a:srgbClr val="141B26"/>
                 </a:solidFill>
               </a:rPr>
               <a:t>Repeating the readings does not remove it.</a:t>
             </a:r>
-            <a:endParaRPr lang="en-US" sz="1500" dirty="0"/>
+            <a:endParaRPr lang="en-US" sz="1800" dirty="0"/>
           </a:p>
         </p:txBody>
       </p:sp>
@@ -7847,14 +7730,14 @@
               <a:buNone/>
             </a:pPr>
             <a:r>
-              <a:rPr lang="en-US" sz="2000" b="1" dirty="0">
+              <a:rPr lang="en-US" sz="2200" b="1" dirty="0">
                 <a:solidFill>
                   <a:srgbClr val="0F2A5F"/>
                 </a:solidFill>
               </a:rPr>
               <a:t>Sampling bias</a:t>
             </a:r>
-            <a:endParaRPr lang="en-US" sz="2000" dirty="0"/>
+            <a:endParaRPr lang="en-US" sz="2200" dirty="0"/>
           </a:p>
         </p:txBody>
       </p:sp>
@@ -7876,81 +7759,79 @@
           <a:ln/>
         </p:spPr>
         <p:txBody>
-          <a:bodyPr wrap="square" lIns="0" tIns="0" rIns="0" bIns="0" rtlCol="0" anchor="t">
-            <a:normAutofit/>
-          </a:bodyPr>
-          <a:lstStyle/>
-          <a:p>
-            <a:pPr marL="228600" indent="-228600">
+          <a:bodyPr wrap="square" lIns="0" tIns="0" rIns="0" bIns="0" rtlCol="0" anchor="t"/>
+          <a:lstStyle/>
+          <a:p>
+            <a:pPr marL="304800" indent="-304800">
               <a:spcAft>
-                <a:spcPts val="600"/>
+                <a:spcPts val="800"/>
               </a:spcAft>
               <a:buSzPct val="100000"/>
               <a:buChar char="•"/>
             </a:pPr>
             <a:r>
-              <a:rPr lang="en-US" sz="1500" dirty="0">
+              <a:rPr lang="en-US" sz="1800" dirty="0">
                 <a:solidFill>
                   <a:srgbClr val="141B26"/>
                 </a:solidFill>
               </a:rPr>
               <a:t>Samples must be taken at random.</a:t>
             </a:r>
-            <a:endParaRPr lang="en-US" sz="1500" dirty="0"/>
-          </a:p>
-          <a:p>
-            <a:pPr marL="228600" indent="-228600">
+            <a:endParaRPr lang="en-US" sz="1800" dirty="0"/>
+          </a:p>
+          <a:p>
+            <a:pPr marL="304800" indent="-304800">
               <a:spcAft>
-                <a:spcPts val="600"/>
+                <a:spcPts val="800"/>
               </a:spcAft>
               <a:buSzPct val="100000"/>
               <a:buChar char="•"/>
             </a:pPr>
             <a:r>
-              <a:rPr lang="en-US" sz="1500" dirty="0">
+              <a:rPr lang="en-US" sz="1800" dirty="0">
                 <a:solidFill>
                   <a:srgbClr val="141B26"/>
                 </a:solidFill>
               </a:rPr>
               <a:t>Choosing 'interesting' areas, or areas likely to give the expected result, biases the estimate.</a:t>
             </a:r>
-            <a:endParaRPr lang="en-US" sz="1500" dirty="0"/>
-          </a:p>
-          <a:p>
-            <a:pPr marL="228600" indent="-228600">
+            <a:endParaRPr lang="en-US" sz="1800" dirty="0"/>
+          </a:p>
+          <a:p>
+            <a:pPr marL="304800" indent="-304800">
               <a:spcAft>
-                <a:spcPts val="600"/>
+                <a:spcPts val="800"/>
               </a:spcAft>
               <a:buSzPct val="100000"/>
               <a:buChar char="•"/>
             </a:pPr>
             <a:r>
-              <a:rPr lang="en-US" sz="1500" dirty="0">
+              <a:rPr lang="en-US" sz="1800" dirty="0">
                 <a:solidFill>
                   <a:srgbClr val="141B26"/>
                 </a:solidFill>
               </a:rPr>
               <a:t>Counting butterflies only on the parts of trunks you can reach misses the ones higher up.</a:t>
             </a:r>
-            <a:endParaRPr lang="en-US" sz="1500" dirty="0"/>
-          </a:p>
-          <a:p>
-            <a:pPr marL="228600" indent="-228600">
+            <a:endParaRPr lang="en-US" sz="1800" dirty="0"/>
+          </a:p>
+          <a:p>
+            <a:pPr marL="304800" indent="-304800">
               <a:spcAft>
-                <a:spcPts val="600"/>
+                <a:spcPts val="800"/>
               </a:spcAft>
               <a:buSzPct val="100000"/>
               <a:buChar char="•"/>
             </a:pPr>
             <a:r>
-              <a:rPr lang="en-US" sz="1500" dirty="0">
+              <a:rPr lang="en-US" sz="1800" dirty="0">
                 <a:solidFill>
                   <a:srgbClr val="141B26"/>
                 </a:solidFill>
               </a:rPr>
               <a:t>The Mexican scientists used a computer to choose sample areas at random.</a:t>
             </a:r>
-            <a:endParaRPr lang="en-US" sz="1500" dirty="0"/>
+            <a:endParaRPr lang="en-US" sz="1800" dirty="0"/>
           </a:p>
         </p:txBody>
       </p:sp>
@@ -7997,16 +7878,14 @@
           <a:ln/>
         </p:spPr>
         <p:txBody>
-          <a:bodyPr wrap="square" lIns="0" tIns="0" rIns="0" bIns="0" rtlCol="0" anchor="ctr">
-            <a:normAutofit/>
-          </a:bodyPr>
+          <a:bodyPr wrap="square" lIns="0" tIns="0" rIns="0" bIns="0" rtlCol="0" anchor="ctr"/>
           <a:lstStyle/>
           <a:p>
             <a:pPr indent="0" marL="0">
               <a:buNone/>
             </a:pPr>
             <a:r>
-              <a:rPr lang="en-US" sz="1400" b="1" dirty="0">
+              <a:rPr lang="en-US" sz="1700" b="1" dirty="0">
                 <a:solidFill>
                   <a:srgbClr val="7B3A8E"/>
                 </a:solidFill>
@@ -8017,14 +7896,14 @@
               <a:buNone/>
             </a:pPr>
             <a:r>
-              <a:rPr lang="en-US" sz="1400" dirty="0">
+              <a:rPr lang="en-US" sz="1700" dirty="0">
                 <a:solidFill>
                   <a:srgbClr val="141B26"/>
                 </a:solidFill>
               </a:rPr>
               <a:t>A random error changes from reading to reading; a systematic error is the same every time, so it hides inside the mean.</a:t>
             </a:r>
-            <a:endParaRPr lang="en-US" sz="1400" dirty="0"/>
+            <a:endParaRPr lang="en-US" sz="1700" dirty="0"/>
           </a:p>
         </p:txBody>
       </p:sp>
@@ -8207,8 +8086,8 @@
         </p:nvSpPr>
         <p:spPr>
           <a:xfrm>
-            <a:off x="548640" y="6053328"/>
-            <a:ext cx="9601200" cy="292608"/>
+            <a:off x="548640" y="6035040"/>
+            <a:ext cx="9601200" cy="310896"/>
           </a:xfrm>
           <a:prstGeom prst="rect">
             <a:avLst/>
@@ -8224,7 +8103,7 @@
               <a:buNone/>
             </a:pPr>
             <a:r>
-              <a:rPr lang="en-US" sz="1200" b="1" dirty="0">
+              <a:rPr lang="en-US" sz="1400" b="1" dirty="0">
                 <a:solidFill>
                   <a:srgbClr val="7B3A8E"/>
                 </a:solidFill>
@@ -8235,14 +8114,14 @@
               <a:buNone/>
             </a:pPr>
             <a:r>
-              <a:rPr lang="en-US" sz="1200" dirty="0">
+              <a:rPr lang="en-US" sz="1400" dirty="0">
                 <a:solidFill>
                   <a:srgbClr val="7B3A8E"/>
                 </a:solidFill>
               </a:rPr>
               <a:t>valid   ·   conclusion</a:t>
             </a:r>
-            <a:endParaRPr lang="en-US" sz="1200" dirty="0"/>
+            <a:endParaRPr lang="en-US" sz="1400" dirty="0"/>
           </a:p>
         </p:txBody>
       </p:sp>
@@ -8264,99 +8143,97 @@
           <a:ln/>
         </p:spPr>
         <p:txBody>
-          <a:bodyPr wrap="square" lIns="0" tIns="0" rIns="0" bIns="0" rtlCol="0" anchor="t">
-            <a:normAutofit/>
-          </a:bodyPr>
-          <a:lstStyle/>
-          <a:p>
-            <a:pPr marL="228600" indent="-228600">
+          <a:bodyPr wrap="square" lIns="0" tIns="0" rIns="0" bIns="0" rtlCol="0" anchor="t"/>
+          <a:lstStyle/>
+          <a:p>
+            <a:pPr marL="304800" indent="-304800">
               <a:spcAft>
-                <a:spcPts val="600"/>
+                <a:spcPts val="800"/>
               </a:spcAft>
               <a:buSzPct val="100000"/>
               <a:buChar char="•"/>
             </a:pPr>
             <a:r>
-              <a:rPr lang="en-US" sz="1700" dirty="0">
+              <a:rPr lang="en-US" sz="2000" dirty="0">
                 <a:solidFill>
                   <a:srgbClr val="141B26"/>
                 </a:solidFill>
               </a:rPr>
               <a:t>Something is valid if it does what it is supposed to do.</a:t>
             </a:r>
-            <a:endParaRPr lang="en-US" sz="1700" dirty="0"/>
-          </a:p>
-          <a:p>
-            <a:pPr marL="228600" indent="-228600">
+            <a:endParaRPr lang="en-US" sz="2000" dirty="0"/>
+          </a:p>
+          <a:p>
+            <a:pPr marL="304800" indent="-304800">
               <a:spcAft>
-                <a:spcPts val="600"/>
+                <a:spcPts val="800"/>
               </a:spcAft>
               <a:buSzPct val="100000"/>
               <a:buChar char="•"/>
             </a:pPr>
             <a:r>
-              <a:rPr lang="en-US" sz="1700" dirty="0">
+              <a:rPr lang="en-US" sz="2000" dirty="0">
                 <a:solidFill>
                   <a:srgbClr val="141B26"/>
                 </a:solidFill>
               </a:rPr>
               <a:t>A fair test is valid because only the independent variable affects the results.</a:t>
             </a:r>
-            <a:endParaRPr lang="en-US" sz="1700" dirty="0"/>
-          </a:p>
-          <a:p>
-            <a:pPr marL="228600" indent="-228600">
+            <a:endParaRPr lang="en-US" sz="2000" dirty="0"/>
+          </a:p>
+          <a:p>
+            <a:pPr marL="304800" indent="-304800">
               <a:spcAft>
-                <a:spcPts val="600"/>
+                <a:spcPts val="800"/>
               </a:spcAft>
               <a:buSzPct val="100000"/>
               <a:buChar char="•"/>
             </a:pPr>
             <a:r>
-              <a:rPr lang="en-US" sz="1700" dirty="0">
+              <a:rPr lang="en-US" sz="2000" dirty="0">
                 <a:solidFill>
                   <a:srgbClr val="141B26"/>
                 </a:solidFill>
               </a:rPr>
               <a:t>Results are valid if they measure what they were supposed to measure.</a:t>
             </a:r>
-            <a:endParaRPr lang="en-US" sz="1700" dirty="0"/>
-          </a:p>
-          <a:p>
-            <a:pPr marL="228600" indent="-228600">
+            <a:endParaRPr lang="en-US" sz="2000" dirty="0"/>
+          </a:p>
+          <a:p>
+            <a:pPr marL="304800" indent="-304800">
               <a:spcAft>
-                <a:spcPts val="600"/>
+                <a:spcPts val="800"/>
               </a:spcAft>
               <a:buSzPct val="100000"/>
               <a:buChar char="•"/>
             </a:pPr>
             <a:r>
-              <a:rPr lang="en-US" sz="1700" dirty="0">
+              <a:rPr lang="en-US" sz="2000" dirty="0">
                 <a:solidFill>
                   <a:srgbClr val="141B26"/>
                 </a:solidFill>
               </a:rPr>
               <a:t>A valid conclusion uses only the results of the investigation, and all of them.</a:t>
             </a:r>
-            <a:endParaRPr lang="en-US" sz="1700" dirty="0"/>
-          </a:p>
-          <a:p>
-            <a:pPr marL="228600" indent="-228600">
+            <a:endParaRPr lang="en-US" sz="2000" dirty="0"/>
+          </a:p>
+          <a:p>
+            <a:pPr marL="304800" indent="-304800">
               <a:spcAft>
-                <a:spcPts val="600"/>
+                <a:spcPts val="800"/>
               </a:spcAft>
               <a:buSzPct val="100000"/>
               <a:buChar char="•"/>
             </a:pPr>
             <a:r>
-              <a:rPr lang="en-US" sz="1700" dirty="0">
+              <a:rPr lang="en-US" sz="2000" dirty="0">
                 <a:solidFill>
                   <a:srgbClr val="141B26"/>
                 </a:solidFill>
               </a:rPr>
               <a:t>'More HT soybean, fewer monarchs' is not a valid conclusion: the percentage planted tells us nothing about milkweed, and other causes were not ruled out.</a:t>
             </a:r>
-            <a:endParaRPr lang="en-US" sz="1700" dirty="0"/>
+            <a:endParaRPr lang="en-US" sz="2000" dirty="0"/>
           </a:p>
         </p:txBody>
       </p:sp>
@@ -8403,16 +8280,14 @@
           <a:ln/>
         </p:spPr>
         <p:txBody>
-          <a:bodyPr wrap="square" lIns="0" tIns="0" rIns="0" bIns="0" rtlCol="0" anchor="ctr">
-            <a:normAutofit/>
-          </a:bodyPr>
+          <a:bodyPr wrap="square" lIns="0" tIns="0" rIns="0" bIns="0" rtlCol="0" anchor="ctr"/>
           <a:lstStyle/>
           <a:p>
             <a:pPr indent="0" marL="0">
               <a:buNone/>
             </a:pPr>
             <a:r>
-              <a:rPr lang="en-US" sz="1400" b="1" dirty="0">
+              <a:rPr lang="en-US" sz="1700" b="1" dirty="0">
                 <a:solidFill>
                   <a:srgbClr val="7B3A8E"/>
                 </a:solidFill>
@@ -8423,14 +8298,14 @@
               <a:buNone/>
             </a:pPr>
             <a:r>
-              <a:rPr lang="en-US" sz="1400" dirty="0">
+              <a:rPr lang="en-US" sz="1700" dirty="0">
                 <a:solidFill>
                   <a:srgbClr val="141B26"/>
                 </a:solidFill>
               </a:rPr>
               <a:t>Valid conclusion = all the results, only the results, and no causes that were never tested.</a:t>
             </a:r>
-            <a:endParaRPr lang="en-US" sz="1400" dirty="0"/>
+            <a:endParaRPr lang="en-US" sz="1700" dirty="0"/>
           </a:p>
         </p:txBody>
       </p:sp>
@@ -8613,8 +8488,8 @@
         </p:nvSpPr>
         <p:spPr>
           <a:xfrm>
-            <a:off x="548640" y="6053328"/>
-            <a:ext cx="9601200" cy="292608"/>
+            <a:off x="548640" y="6035040"/>
+            <a:ext cx="9601200" cy="310896"/>
           </a:xfrm>
           <a:prstGeom prst="rect">
             <a:avLst/>
@@ -8630,7 +8505,7 @@
               <a:buNone/>
             </a:pPr>
             <a:r>
-              <a:rPr lang="en-US" sz="1200" b="1" dirty="0">
+              <a:rPr lang="en-US" sz="1400" b="1" dirty="0">
                 <a:solidFill>
                   <a:srgbClr val="7B3A8E"/>
                 </a:solidFill>
@@ -8641,14 +8516,14 @@
               <a:buNone/>
             </a:pPr>
             <a:r>
-              <a:rPr lang="en-US" sz="1200" dirty="0">
+              <a:rPr lang="en-US" sz="1400" dirty="0">
                 <a:solidFill>
                   <a:srgbClr val="7B3A8E"/>
                 </a:solidFill>
               </a:rPr>
               <a:t>organic farming   ·   intensive farming   ·   crop rotation</a:t>
             </a:r>
-            <a:endParaRPr lang="en-US" sz="1200" dirty="0"/>
+            <a:endParaRPr lang="en-US" sz="1400" dirty="0"/>
           </a:p>
         </p:txBody>
       </p:sp>
@@ -10103,16 +9978,14 @@
           <a:ln/>
         </p:spPr>
         <p:txBody>
-          <a:bodyPr wrap="square" lIns="0" tIns="0" rIns="0" bIns="0" rtlCol="0" anchor="ctr">
-            <a:normAutofit/>
-          </a:bodyPr>
+          <a:bodyPr wrap="square" lIns="0" tIns="0" rIns="0" bIns="0" rtlCol="0" anchor="ctr"/>
           <a:lstStyle/>
           <a:p>
             <a:pPr indent="0" marL="0">
               <a:buNone/>
             </a:pPr>
             <a:r>
-              <a:rPr lang="en-US" sz="1400" b="1" dirty="0">
+              <a:rPr lang="en-US" sz="1700" b="1" dirty="0">
                 <a:solidFill>
                   <a:srgbClr val="7B3A8E"/>
                 </a:solidFill>
@@ -10123,14 +9996,14 @@
               <a:buNone/>
             </a:pPr>
             <a:r>
-              <a:rPr lang="en-US" sz="1400" dirty="0">
+              <a:rPr lang="en-US" sz="1700" dirty="0">
                 <a:solidFill>
                   <a:srgbClr val="141B26"/>
                 </a:solidFill>
               </a:rPr>
               <a:t>Organic farms have more biodiversity; intensive farms grow more food on less land. Neither is simply better.</a:t>
             </a:r>
-            <a:endParaRPr lang="en-US" sz="1400" dirty="0"/>
+            <a:endParaRPr lang="en-US" sz="1700" dirty="0"/>
           </a:p>
         </p:txBody>
       </p:sp>
@@ -10313,8 +10186,8 @@
         </p:nvSpPr>
         <p:spPr>
           <a:xfrm>
-            <a:off x="548640" y="6053328"/>
-            <a:ext cx="9601200" cy="292608"/>
+            <a:off x="548640" y="6035040"/>
+            <a:ext cx="9601200" cy="310896"/>
           </a:xfrm>
           <a:prstGeom prst="rect">
             <a:avLst/>
@@ -10330,7 +10203,7 @@
               <a:buNone/>
             </a:pPr>
             <a:r>
-              <a:rPr lang="en-US" sz="1200" b="1" dirty="0">
+              <a:rPr lang="en-US" sz="1400" b="1" dirty="0">
                 <a:solidFill>
                   <a:srgbClr val="7B3A8E"/>
                 </a:solidFill>
@@ -10341,14 +10214,14 @@
               <a:buNone/>
             </a:pPr>
             <a:r>
-              <a:rPr lang="en-US" sz="1200" dirty="0">
+              <a:rPr lang="en-US" sz="1400" dirty="0">
                 <a:solidFill>
                   <a:srgbClr val="7B3A8E"/>
                 </a:solidFill>
               </a:rPr>
               <a:t>biological control</a:t>
             </a:r>
-            <a:endParaRPr lang="en-US" sz="1200" dirty="0"/>
+            <a:endParaRPr lang="en-US" sz="1400" dirty="0"/>
           </a:p>
         </p:txBody>
       </p:sp>
@@ -10370,99 +10243,97 @@
           <a:ln/>
         </p:spPr>
         <p:txBody>
-          <a:bodyPr wrap="square" lIns="0" tIns="0" rIns="0" bIns="0" rtlCol="0" anchor="t">
-            <a:normAutofit/>
-          </a:bodyPr>
-          <a:lstStyle/>
-          <a:p>
-            <a:pPr marL="228600" indent="-228600">
+          <a:bodyPr wrap="square" lIns="0" tIns="0" rIns="0" bIns="0" rtlCol="0" anchor="t"/>
+          <a:lstStyle/>
+          <a:p>
+            <a:pPr marL="304800" indent="-304800">
               <a:spcAft>
-                <a:spcPts val="600"/>
+                <a:spcPts val="800"/>
               </a:spcAft>
               <a:buSzPct val="100000"/>
               <a:buChar char="•"/>
             </a:pPr>
             <a:r>
-              <a:rPr lang="en-US" sz="1700" dirty="0">
+              <a:rPr lang="en-US" sz="2000" dirty="0">
                 <a:solidFill>
                   <a:srgbClr val="141B26"/>
                 </a:solidFill>
               </a:rPr>
               <a:t>Biological control uses other organisms to reduce pests.</a:t>
             </a:r>
-            <a:endParaRPr lang="en-US" sz="1700" dirty="0"/>
-          </a:p>
-          <a:p>
-            <a:pPr marL="228600" indent="-228600">
+            <a:endParaRPr lang="en-US" sz="2000" dirty="0"/>
+          </a:p>
+          <a:p>
+            <a:pPr marL="304800" indent="-304800">
               <a:spcAft>
-                <a:spcPts val="600"/>
+                <a:spcPts val="800"/>
               </a:spcAft>
               <a:buSzPct val="100000"/>
               <a:buChar char="•"/>
             </a:pPr>
             <a:r>
-              <a:rPr lang="en-US" sz="1700" dirty="0">
+              <a:rPr lang="en-US" sz="2000" dirty="0">
                 <a:solidFill>
                   <a:srgbClr val="141B26"/>
                 </a:solidFill>
               </a:rPr>
               <a:t>Hoverfly larvae eat aphids. Ladybirds do too.</a:t>
             </a:r>
-            <a:endParaRPr lang="en-US" sz="1700" dirty="0"/>
-          </a:p>
-          <a:p>
-            <a:pPr marL="228600" indent="-228600">
+            <a:endParaRPr lang="en-US" sz="2000" dirty="0"/>
+          </a:p>
+          <a:p>
+            <a:pPr marL="304800" indent="-304800">
               <a:spcAft>
-                <a:spcPts val="600"/>
+                <a:spcPts val="800"/>
               </a:spcAft>
               <a:buSzPct val="100000"/>
               <a:buChar char="•"/>
             </a:pPr>
             <a:r>
-              <a:rPr lang="en-US" sz="1700" dirty="0">
+              <a:rPr lang="en-US" sz="2000" dirty="0">
                 <a:solidFill>
                   <a:srgbClr val="141B26"/>
                 </a:solidFill>
               </a:rPr>
               <a:t>Hedges and trees give these helpful predators somewhere to live, and give insect-eating birds a home.</a:t>
             </a:r>
-            <a:endParaRPr lang="en-US" sz="1700" dirty="0"/>
-          </a:p>
-          <a:p>
-            <a:pPr marL="228600" indent="-228600">
+            <a:endParaRPr lang="en-US" sz="2000" dirty="0"/>
+          </a:p>
+          <a:p>
+            <a:pPr marL="304800" indent="-304800">
               <a:spcAft>
-                <a:spcPts val="600"/>
+                <a:spcPts val="800"/>
               </a:spcAft>
               <a:buSzPct val="100000"/>
               <a:buChar char="•"/>
             </a:pPr>
             <a:r>
-              <a:rPr lang="en-US" sz="1700" dirty="0">
+              <a:rPr lang="en-US" sz="2000" dirty="0">
                 <a:solidFill>
                   <a:srgbClr val="141B26"/>
                 </a:solidFill>
               </a:rPr>
               <a:t>No pesticide means no harm to pollinators and no bioaccumulation.</a:t>
             </a:r>
-            <a:endParaRPr lang="en-US" sz="1700" dirty="0"/>
-          </a:p>
-          <a:p>
-            <a:pPr marL="228600" indent="-228600">
+            <a:endParaRPr lang="en-US" sz="2000" dirty="0"/>
+          </a:p>
+          <a:p>
+            <a:pPr marL="304800" indent="-304800">
               <a:spcAft>
-                <a:spcPts val="600"/>
+                <a:spcPts val="800"/>
               </a:spcAft>
               <a:buSzPct val="100000"/>
               <a:buChar char="•"/>
             </a:pPr>
             <a:r>
-              <a:rPr lang="en-US" sz="1700" dirty="0">
+              <a:rPr lang="en-US" sz="2000" dirty="0">
                 <a:solidFill>
                   <a:srgbClr val="141B26"/>
                 </a:solidFill>
               </a:rPr>
               <a:t>But it is slower, and the pests are never removed completely.</a:t>
             </a:r>
-            <a:endParaRPr lang="en-US" sz="1700" dirty="0"/>
+            <a:endParaRPr lang="en-US" sz="2000" dirty="0"/>
           </a:p>
         </p:txBody>
       </p:sp>
@@ -10499,7 +10370,7 @@
         <p:spPr>
           <a:xfrm>
             <a:off x="6583680" y="4983480"/>
-            <a:ext cx="5029200" cy="502920"/>
+            <a:ext cx="5029200" cy="548640"/>
           </a:xfrm>
           <a:prstGeom prst="rect">
             <a:avLst/>
@@ -10515,7 +10386,7 @@
               <a:buNone/>
             </a:pPr>
             <a:r>
-              <a:rPr lang="en-US" sz="1100" dirty="0">
+              <a:rPr lang="en-US" sz="1300" dirty="0">
                 <a:solidFill>
                   <a:srgbClr val="141B26"/>
                 </a:solidFill>
@@ -10525,21 +10396,21 @@
             <a:pPr algn="l" indent="0" marL="0">
               <a:buNone/>
             </a:pPr>
-            <a:endParaRPr lang="en-US" sz="1100" dirty="0"/>
+            <a:endParaRPr lang="en-US" sz="1300" dirty="0"/>
           </a:p>
           <a:p>
             <a:pPr algn="l" indent="0" marL="0">
               <a:buNone/>
             </a:pPr>
             <a:r>
-              <a:rPr lang="en-US" sz="800" dirty="0">
+              <a:rPr lang="en-US" sz="900" dirty="0">
                 <a:solidFill>
                   <a:srgbClr val="5B6574"/>
                 </a:solidFill>
               </a:rPr>
               <a:t>Image: The Manic Macrographer, CC BY 2.0, via Wikimedia Commons</a:t>
             </a:r>
-            <a:endParaRPr lang="en-US" sz="1100" dirty="0"/>
+            <a:endParaRPr lang="en-US" sz="1300" dirty="0"/>
           </a:p>
         </p:txBody>
       </p:sp>
@@ -10586,16 +10457,14 @@
           <a:ln/>
         </p:spPr>
         <p:txBody>
-          <a:bodyPr wrap="square" lIns="0" tIns="0" rIns="0" bIns="0" rtlCol="0" anchor="ctr">
-            <a:normAutofit/>
-          </a:bodyPr>
+          <a:bodyPr wrap="square" lIns="0" tIns="0" rIns="0" bIns="0" rtlCol="0" anchor="ctr"/>
           <a:lstStyle/>
           <a:p>
             <a:pPr indent="0" marL="0">
               <a:buNone/>
             </a:pPr>
             <a:r>
-              <a:rPr lang="en-US" sz="1400" b="1" dirty="0">
+              <a:rPr lang="en-US" sz="1700" b="1" dirty="0">
                 <a:solidFill>
                   <a:srgbClr val="7B3A8E"/>
                 </a:solidFill>
@@ -10606,14 +10475,14 @@
               <a:buNone/>
             </a:pPr>
             <a:r>
-              <a:rPr lang="en-US" sz="1400" dirty="0">
+              <a:rPr lang="en-US" sz="1700" dirty="0">
                 <a:solidFill>
                   <a:srgbClr val="141B26"/>
                 </a:solidFill>
               </a:rPr>
               <a:t>A hedge is not wasted land: it houses the predators that protect the crop for free.</a:t>
             </a:r>
-            <a:endParaRPr lang="en-US" sz="1400" dirty="0"/>
+            <a:endParaRPr lang="en-US" sz="1700" dirty="0"/>
           </a:p>
         </p:txBody>
       </p:sp>
